--- a/Courses/145060/units/unit-03-repetition-text-adventure/04-slides/exports/MCCTC_145060_Slides_W08_AlgorithmsAndData.pptx
+++ b/Courses/145060/units/unit-03-repetition-text-adventure/04-slides/exports/MCCTC_145060_Slides_W08_AlgorithmsAndData.pptx
@@ -702,7 +702,7 @@
           <a:p>
             <a:r>
               <a:rPr lang="en-US" dirty="0"/>
-              <a:t>Build one is the leaderboard lab. One pass through a night of game results answers four questions, and a second loop searches for a player's first big round and stops as soon as it finds it. Step four makes you start the low score at zero and record the result. Build two is your text adventure. Write your win and lose test scripts, fix what your playtester found Friday, and draft your README, because v1 is due at the end of the day tomorrow. Congressional App Challenge teams, today is the deadline, and I will check in with you first.</a:t>
+              <a:t>Build one is the leaderboard lab. One pass through a night of game results answers four questions, and a second loop searches for a player's first big round and stops as soon as it finds it. Step four makes you start the low score at zero and record the result. Build two is your text adventure. Write your win and lose test scripts, fix what your playtester found Friday, and draft your README, because v1 is due at the end of the day tomorrow. Congressional App Challenge teams, today is your last class day to submit, and I will check in with you first.</a:t>
             </a:r>
             <a:endParaRPr lang="en-US" dirty="0"/>
           </a:p>
@@ -1854,7 +1854,7 @@
         </p:blipFill>
         <p:spPr>
           <a:xfrm>
-            <a:off x="7619809" y="0"/>
+            <a:off x="0" y="0"/>
             <a:ext cx="4571886" cy="6858000"/>
           </a:xfrm>
           <a:prstGeom prst="rect">
@@ -1870,7 +1870,7 @@
         </p:nvSpPr>
         <p:spPr>
           <a:xfrm>
-            <a:off x="661475" y="2776934"/>
+            <a:off x="5233360" y="2776934"/>
             <a:ext cx="6296860" cy="1181298"/>
           </a:xfrm>
           <a:prstGeom prst="rect">
@@ -1939,8 +1939,8 @@
         </p:nvSpPr>
         <p:spPr>
           <a:xfrm>
-            <a:off x="661475" y="902295"/>
-            <a:ext cx="10868745" cy="590649"/>
+            <a:off x="661475" y="575866"/>
+            <a:ext cx="10868745" cy="461466"/>
           </a:xfrm>
           <a:prstGeom prst="rect">
             <a:avLst/>
@@ -1959,7 +1959,7 @@
               <a:buNone/>
             </a:pPr>
             <a:r>
-              <a:rPr lang="en-US" sz="3700" b="1" dirty="0">
+              <a:rPr lang="en-US" sz="2900" b="1" dirty="0">
                 <a:solidFill>
                   <a:srgbClr val="111111"/>
                 </a:solidFill>
@@ -1969,60 +1969,13 @@
               </a:rPr>
               <a:t>Five algorithms to recognize</a:t>
             </a:r>
-            <a:endParaRPr lang="en-US" sz="3700" dirty="0"/>
-          </a:p>
-        </p:txBody>
-      </p:sp>
-      <p:sp>
-        <p:nvSpPr>
-          <p:cNvPr id="3" name="Shape 1"/>
-          <p:cNvSpPr/>
-          <p:nvPr/>
-        </p:nvSpPr>
-        <p:spPr>
-          <a:xfrm>
-            <a:off x="661475" y="1870968"/>
-            <a:ext cx="3496877" cy="1883271"/>
-          </a:xfrm>
-          <a:prstGeom prst="roundRect">
-            <a:avLst>
-              <a:gd name="adj" fmla="val 4215"/>
-            </a:avLst>
-          </a:prstGeom>
-          <a:solidFill>
-            <a:srgbClr val="D1E5FA"/>
-          </a:solidFill>
-          <a:ln w="19050">
-            <a:solidFill>
-              <a:srgbClr val="B7CBE0"/>
-            </a:solidFill>
-            <a:prstDash val="solid"/>
-          </a:ln>
-        </p:spPr>
-      </p:sp>
-      <p:sp>
-        <p:nvSpPr>
-          <p:cNvPr id="4" name="Shape 2"/>
-          <p:cNvSpPr/>
-          <p:nvPr/>
-        </p:nvSpPr>
-        <p:spPr>
-          <a:xfrm>
-            <a:off x="869531" y="2079030"/>
-            <a:ext cx="567021" cy="567035"/>
-          </a:xfrm>
-          <a:prstGeom prst="ellipse">
-            <a:avLst/>
-          </a:prstGeom>
-          <a:solidFill>
-            <a:srgbClr val="57A1EB"/>
-          </a:solidFill>
-          <a:ln/>
-        </p:spPr>
+            <a:endParaRPr lang="en-US" sz="2900" dirty="0"/>
+          </a:p>
+        </p:txBody>
       </p:sp>
       <p:pic>
         <p:nvPicPr>
-          <p:cNvPr id="5" name="Image 0" descr="preencoded.png">    </p:cNvPr>
+          <p:cNvPr id="3" name="Image 0" descr="preencoded.png">    </p:cNvPr>
           <p:cNvPicPr>
             <a:picLocks noChangeAspect="1"/>
           </p:cNvPicPr>
@@ -2042,8 +1995,8 @@
         </p:blipFill>
         <p:spPr>
           <a:xfrm>
-            <a:off x="1025499" y="2234902"/>
-            <a:ext cx="255085" cy="255091"/>
+            <a:off x="661475" y="1268016"/>
+            <a:ext cx="10868745" cy="886023"/>
           </a:xfrm>
           <a:prstGeom prst="rect">
             <a:avLst/>
@@ -2052,14 +2005,14 @@
       </p:pic>
       <p:sp>
         <p:nvSpPr>
-          <p:cNvPr id="6" name="Text 3"/>
-          <p:cNvSpPr/>
-          <p:nvPr/>
-        </p:nvSpPr>
-        <p:spPr>
-          <a:xfrm>
-            <a:off x="869531" y="2835077"/>
-            <a:ext cx="3080764" cy="295275"/>
+          <p:cNvPr id="4" name="Text 1"/>
+          <p:cNvSpPr/>
+          <p:nvPr/>
+        </p:nvSpPr>
+        <p:spPr>
+          <a:xfrm>
+            <a:off x="858717" y="1572617"/>
+            <a:ext cx="221451" cy="276820"/>
           </a:xfrm>
           <a:prstGeom prst="rect">
             <a:avLst/>
@@ -2068,17 +2021,17 @@
           <a:ln/>
         </p:spPr>
         <p:txBody>
-          <a:bodyPr wrap="none" lIns="0" tIns="0" rIns="0" bIns="0" rtlCol="0" anchor="t"/>
-          <a:lstStyle/>
-          <a:p>
-            <a:pPr algn="l" indent="0" marL="0">
-              <a:lnSpc>
-                <a:spcPct val="104000"/>
-              </a:lnSpc>
-              <a:buNone/>
-            </a:pPr>
-            <a:r>
-              <a:rPr lang="en-US" sz="1850" b="1" dirty="0">
+          <a:bodyPr wrap="none" lIns="0" tIns="0" rIns="0" bIns="0" rtlCol="0" anchor="ctr"/>
+          <a:lstStyle/>
+          <a:p>
+            <a:pPr algn="ctr" indent="0" marL="0">
+              <a:lnSpc>
+                <a:spcPct val="100000"/>
+              </a:lnSpc>
+              <a:buNone/>
+            </a:pPr>
+            <a:r>
+              <a:rPr lang="en-US" sz="1700" b="1" dirty="0">
                 <a:solidFill>
                   <a:srgbClr val="1C1C1C"/>
                 </a:solidFill>
@@ -2086,22 +2039,22 @@
                 <a:ea typeface="Orbitron Bold" pitchFamily="34" charset="-122"/>
                 <a:cs typeface="Orbitron Bold" pitchFamily="34" charset="-120"/>
               </a:rPr>
-              <a:t>Count</a:t>
-            </a:r>
-            <a:endParaRPr lang="en-US" sz="1850" dirty="0"/>
-          </a:p>
-        </p:txBody>
-      </p:sp>
-      <p:sp>
-        <p:nvSpPr>
-          <p:cNvPr id="7" name="Text 4"/>
-          <p:cNvSpPr/>
-          <p:nvPr/>
-        </p:nvSpPr>
-        <p:spPr>
-          <a:xfrm>
-            <a:off x="869531" y="3243759"/>
-            <a:ext cx="3080764" cy="302419"/>
+              <a:t>1</a:t>
+            </a:r>
+            <a:endParaRPr lang="en-US" sz="1700" dirty="0"/>
+          </a:p>
+        </p:txBody>
+      </p:sp>
+      <p:sp>
+        <p:nvSpPr>
+          <p:cNvPr id="5" name="Text 2"/>
+          <p:cNvSpPr/>
+          <p:nvPr/>
+        </p:nvSpPr>
+        <p:spPr>
+          <a:xfrm>
+            <a:off x="1386448" y="1434703"/>
+            <a:ext cx="9977089" cy="230684"/>
           </a:xfrm>
           <a:prstGeom prst="rect">
             <a:avLst/>
@@ -2115,12 +2068,54 @@
           <a:p>
             <a:pPr algn="l" indent="0" marL="0">
               <a:lnSpc>
-                <a:spcPct val="133000"/>
-              </a:lnSpc>
-              <a:buNone/>
-            </a:pPr>
-            <a:r>
-              <a:rPr lang="en-US" sz="1450" dirty="0">
+                <a:spcPct val="104000"/>
+              </a:lnSpc>
+              <a:buNone/>
+            </a:pPr>
+            <a:r>
+              <a:rPr lang="en-US" sz="1450" b="1" dirty="0">
+                <a:solidFill>
+                  <a:srgbClr val="1C1C1C"/>
+                </a:solidFill>
+                <a:latin typeface="Orbitron Bold" pitchFamily="34" charset="0"/>
+                <a:ea typeface="Orbitron Bold" pitchFamily="34" charset="-122"/>
+                <a:cs typeface="Orbitron Bold" pitchFamily="34" charset="-120"/>
+              </a:rPr>
+              <a:t>Count</a:t>
+            </a:r>
+            <a:endParaRPr lang="en-US" sz="1450" dirty="0"/>
+          </a:p>
+        </p:txBody>
+      </p:sp>
+      <p:sp>
+        <p:nvSpPr>
+          <p:cNvPr id="6" name="Text 3"/>
+          <p:cNvSpPr/>
+          <p:nvPr/>
+        </p:nvSpPr>
+        <p:spPr>
+          <a:xfrm>
+            <a:off x="1386448" y="1734542"/>
+            <a:ext cx="9977089" cy="210344"/>
+          </a:xfrm>
+          <a:prstGeom prst="rect">
+            <a:avLst/>
+          </a:prstGeom>
+          <a:noFill/>
+          <a:ln/>
+        </p:spPr>
+        <p:txBody>
+          <a:bodyPr wrap="none" lIns="0" tIns="0" rIns="0" bIns="0" rtlCol="0" anchor="t"/>
+          <a:lstStyle/>
+          <a:p>
+            <a:pPr algn="l" indent="0" marL="0">
+              <a:lnSpc>
+                <a:spcPct val="119000"/>
+              </a:lnSpc>
+              <a:buNone/>
+            </a:pPr>
+            <a:r>
+              <a:rPr lang="en-US" sz="1150" dirty="0">
                 <a:solidFill>
                   <a:srgbClr val="1C1C1C"/>
                 </a:solidFill>
@@ -2130,60 +2125,13 @@
               </a:rPr>
               <a:t>How many</a:t>
             </a:r>
-            <a:endParaRPr lang="en-US" sz="1450" dirty="0"/>
-          </a:p>
-        </p:txBody>
-      </p:sp>
-      <p:sp>
-        <p:nvSpPr>
-          <p:cNvPr id="8" name="Shape 5"/>
-          <p:cNvSpPr/>
-          <p:nvPr/>
-        </p:nvSpPr>
-        <p:spPr>
-          <a:xfrm>
-            <a:off x="4347359" y="1870968"/>
-            <a:ext cx="3496877" cy="1883271"/>
-          </a:xfrm>
-          <a:prstGeom prst="roundRect">
-            <a:avLst>
-              <a:gd name="adj" fmla="val 4215"/>
-            </a:avLst>
-          </a:prstGeom>
-          <a:solidFill>
-            <a:srgbClr val="D1E5FA"/>
-          </a:solidFill>
-          <a:ln w="19050">
-            <a:solidFill>
-              <a:srgbClr val="B7CBE0"/>
-            </a:solidFill>
-            <a:prstDash val="solid"/>
-          </a:ln>
-        </p:spPr>
-      </p:sp>
-      <p:sp>
-        <p:nvSpPr>
-          <p:cNvPr id="9" name="Shape 6"/>
-          <p:cNvSpPr/>
-          <p:nvPr/>
-        </p:nvSpPr>
-        <p:spPr>
-          <a:xfrm>
-            <a:off x="4555416" y="2079030"/>
-            <a:ext cx="567021" cy="567035"/>
-          </a:xfrm>
-          <a:prstGeom prst="ellipse">
-            <a:avLst/>
-          </a:prstGeom>
-          <a:solidFill>
-            <a:srgbClr val="57A1EB"/>
-          </a:solidFill>
-          <a:ln/>
-        </p:spPr>
+            <a:endParaRPr lang="en-US" sz="1150" dirty="0"/>
+          </a:p>
+        </p:txBody>
       </p:sp>
       <p:pic>
         <p:nvPicPr>
-          <p:cNvPr id="10" name="Image 1" descr="preencoded.png">    </p:cNvPr>
+          <p:cNvPr id="7" name="Image 1" descr="preencoded.png">    </p:cNvPr>
           <p:cNvPicPr>
             <a:picLocks noChangeAspect="1"/>
           </p:cNvPicPr>
@@ -2203,8 +2151,8 @@
         </p:blipFill>
         <p:spPr>
           <a:xfrm>
-            <a:off x="4711384" y="2234902"/>
-            <a:ext cx="255085" cy="255091"/>
+            <a:off x="661475" y="2269331"/>
+            <a:ext cx="10868745" cy="886023"/>
           </a:xfrm>
           <a:prstGeom prst="rect">
             <a:avLst/>
@@ -2213,14 +2161,14 @@
       </p:pic>
       <p:sp>
         <p:nvSpPr>
-          <p:cNvPr id="11" name="Text 7"/>
-          <p:cNvSpPr/>
-          <p:nvPr/>
-        </p:nvSpPr>
-        <p:spPr>
-          <a:xfrm>
-            <a:off x="4555416" y="2835077"/>
-            <a:ext cx="3080764" cy="295275"/>
+          <p:cNvPr id="8" name="Text 4"/>
+          <p:cNvSpPr/>
+          <p:nvPr/>
+        </p:nvSpPr>
+        <p:spPr>
+          <a:xfrm>
+            <a:off x="858717" y="2573933"/>
+            <a:ext cx="221451" cy="276820"/>
           </a:xfrm>
           <a:prstGeom prst="rect">
             <a:avLst/>
@@ -2229,17 +2177,17 @@
           <a:ln/>
         </p:spPr>
         <p:txBody>
-          <a:bodyPr wrap="none" lIns="0" tIns="0" rIns="0" bIns="0" rtlCol="0" anchor="t"/>
-          <a:lstStyle/>
-          <a:p>
-            <a:pPr algn="l" indent="0" marL="0">
-              <a:lnSpc>
-                <a:spcPct val="104000"/>
-              </a:lnSpc>
-              <a:buNone/>
-            </a:pPr>
-            <a:r>
-              <a:rPr lang="en-US" sz="1850" b="1" dirty="0">
+          <a:bodyPr wrap="none" lIns="0" tIns="0" rIns="0" bIns="0" rtlCol="0" anchor="ctr"/>
+          <a:lstStyle/>
+          <a:p>
+            <a:pPr algn="ctr" indent="0" marL="0">
+              <a:lnSpc>
+                <a:spcPct val="100000"/>
+              </a:lnSpc>
+              <a:buNone/>
+            </a:pPr>
+            <a:r>
+              <a:rPr lang="en-US" sz="1700" b="1" dirty="0">
                 <a:solidFill>
                   <a:srgbClr val="1C1C1C"/>
                 </a:solidFill>
@@ -2247,22 +2195,22 @@
                 <a:ea typeface="Orbitron Bold" pitchFamily="34" charset="-122"/>
                 <a:cs typeface="Orbitron Bold" pitchFamily="34" charset="-120"/>
               </a:rPr>
-              <a:t>Total</a:t>
-            </a:r>
-            <a:endParaRPr lang="en-US" sz="1850" dirty="0"/>
-          </a:p>
-        </p:txBody>
-      </p:sp>
-      <p:sp>
-        <p:nvSpPr>
-          <p:cNvPr id="12" name="Text 8"/>
-          <p:cNvSpPr/>
-          <p:nvPr/>
-        </p:nvSpPr>
-        <p:spPr>
-          <a:xfrm>
-            <a:off x="4555416" y="3243759"/>
-            <a:ext cx="3080764" cy="302419"/>
+              <a:t>2</a:t>
+            </a:r>
+            <a:endParaRPr lang="en-US" sz="1700" dirty="0"/>
+          </a:p>
+        </p:txBody>
+      </p:sp>
+      <p:sp>
+        <p:nvSpPr>
+          <p:cNvPr id="9" name="Text 5"/>
+          <p:cNvSpPr/>
+          <p:nvPr/>
+        </p:nvSpPr>
+        <p:spPr>
+          <a:xfrm>
+            <a:off x="1386448" y="2436019"/>
+            <a:ext cx="9977089" cy="230684"/>
           </a:xfrm>
           <a:prstGeom prst="rect">
             <a:avLst/>
@@ -2276,12 +2224,54 @@
           <a:p>
             <a:pPr algn="l" indent="0" marL="0">
               <a:lnSpc>
-                <a:spcPct val="133000"/>
-              </a:lnSpc>
-              <a:buNone/>
-            </a:pPr>
-            <a:r>
-              <a:rPr lang="en-US" sz="1450" dirty="0">
+                <a:spcPct val="104000"/>
+              </a:lnSpc>
+              <a:buNone/>
+            </a:pPr>
+            <a:r>
+              <a:rPr lang="en-US" sz="1450" b="1" dirty="0">
+                <a:solidFill>
+                  <a:srgbClr val="1C1C1C"/>
+                </a:solidFill>
+                <a:latin typeface="Orbitron Bold" pitchFamily="34" charset="0"/>
+                <a:ea typeface="Orbitron Bold" pitchFamily="34" charset="-122"/>
+                <a:cs typeface="Orbitron Bold" pitchFamily="34" charset="-120"/>
+              </a:rPr>
+              <a:t>Total</a:t>
+            </a:r>
+            <a:endParaRPr lang="en-US" sz="1450" dirty="0"/>
+          </a:p>
+        </p:txBody>
+      </p:sp>
+      <p:sp>
+        <p:nvSpPr>
+          <p:cNvPr id="10" name="Text 6"/>
+          <p:cNvSpPr/>
+          <p:nvPr/>
+        </p:nvSpPr>
+        <p:spPr>
+          <a:xfrm>
+            <a:off x="1386448" y="2735858"/>
+            <a:ext cx="9977089" cy="210344"/>
+          </a:xfrm>
+          <a:prstGeom prst="rect">
+            <a:avLst/>
+          </a:prstGeom>
+          <a:noFill/>
+          <a:ln/>
+        </p:spPr>
+        <p:txBody>
+          <a:bodyPr wrap="none" lIns="0" tIns="0" rIns="0" bIns="0" rtlCol="0" anchor="t"/>
+          <a:lstStyle/>
+          <a:p>
+            <a:pPr algn="l" indent="0" marL="0">
+              <a:lnSpc>
+                <a:spcPct val="119000"/>
+              </a:lnSpc>
+              <a:buNone/>
+            </a:pPr>
+            <a:r>
+              <a:rPr lang="en-US" sz="1150" dirty="0">
                 <a:solidFill>
                   <a:srgbClr val="1C1C1C"/>
                 </a:solidFill>
@@ -2291,60 +2281,13 @@
               </a:rPr>
               <a:t>How much altogether</a:t>
             </a:r>
-            <a:endParaRPr lang="en-US" sz="1450" dirty="0"/>
-          </a:p>
-        </p:txBody>
-      </p:sp>
-      <p:sp>
-        <p:nvSpPr>
-          <p:cNvPr id="13" name="Shape 9"/>
-          <p:cNvSpPr/>
-          <p:nvPr/>
-        </p:nvSpPr>
-        <p:spPr>
-          <a:xfrm>
-            <a:off x="8033244" y="1870968"/>
-            <a:ext cx="3496877" cy="1883271"/>
-          </a:xfrm>
-          <a:prstGeom prst="roundRect">
-            <a:avLst>
-              <a:gd name="adj" fmla="val 4215"/>
-            </a:avLst>
-          </a:prstGeom>
-          <a:solidFill>
-            <a:srgbClr val="D1E5FA"/>
-          </a:solidFill>
-          <a:ln w="19050">
-            <a:solidFill>
-              <a:srgbClr val="B7CBE0"/>
-            </a:solidFill>
-            <a:prstDash val="solid"/>
-          </a:ln>
-        </p:spPr>
-      </p:sp>
-      <p:sp>
-        <p:nvSpPr>
-          <p:cNvPr id="14" name="Shape 10"/>
-          <p:cNvSpPr/>
-          <p:nvPr/>
-        </p:nvSpPr>
-        <p:spPr>
-          <a:xfrm>
-            <a:off x="8241300" y="2079030"/>
-            <a:ext cx="567021" cy="567035"/>
-          </a:xfrm>
-          <a:prstGeom prst="ellipse">
-            <a:avLst/>
-          </a:prstGeom>
-          <a:solidFill>
-            <a:srgbClr val="57A1EB"/>
-          </a:solidFill>
-          <a:ln/>
-        </p:spPr>
+            <a:endParaRPr lang="en-US" sz="1150" dirty="0"/>
+          </a:p>
+        </p:txBody>
       </p:sp>
       <p:pic>
         <p:nvPicPr>
-          <p:cNvPr id="15" name="Image 2" descr="preencoded.png">    </p:cNvPr>
+          <p:cNvPr id="11" name="Image 2" descr="preencoded.png">    </p:cNvPr>
           <p:cNvPicPr>
             <a:picLocks noChangeAspect="1"/>
           </p:cNvPicPr>
@@ -2364,8 +2307,8 @@
         </p:blipFill>
         <p:spPr>
           <a:xfrm>
-            <a:off x="8397268" y="2234902"/>
-            <a:ext cx="255085" cy="255091"/>
+            <a:off x="661475" y="3270647"/>
+            <a:ext cx="10868745" cy="886023"/>
           </a:xfrm>
           <a:prstGeom prst="rect">
             <a:avLst/>
@@ -2374,14 +2317,14 @@
       </p:pic>
       <p:sp>
         <p:nvSpPr>
-          <p:cNvPr id="16" name="Text 11"/>
-          <p:cNvSpPr/>
-          <p:nvPr/>
-        </p:nvSpPr>
-        <p:spPr>
-          <a:xfrm>
-            <a:off x="8241300" y="2835077"/>
-            <a:ext cx="3080764" cy="295275"/>
+          <p:cNvPr id="12" name="Text 7"/>
+          <p:cNvSpPr/>
+          <p:nvPr/>
+        </p:nvSpPr>
+        <p:spPr>
+          <a:xfrm>
+            <a:off x="858717" y="3575248"/>
+            <a:ext cx="221451" cy="276820"/>
           </a:xfrm>
           <a:prstGeom prst="rect">
             <a:avLst/>
@@ -2390,17 +2333,17 @@
           <a:ln/>
         </p:spPr>
         <p:txBody>
-          <a:bodyPr wrap="none" lIns="0" tIns="0" rIns="0" bIns="0" rtlCol="0" anchor="t"/>
-          <a:lstStyle/>
-          <a:p>
-            <a:pPr algn="l" indent="0" marL="0">
-              <a:lnSpc>
-                <a:spcPct val="104000"/>
-              </a:lnSpc>
-              <a:buNone/>
-            </a:pPr>
-            <a:r>
-              <a:rPr lang="en-US" sz="1850" b="1" dirty="0">
+          <a:bodyPr wrap="none" lIns="0" tIns="0" rIns="0" bIns="0" rtlCol="0" anchor="ctr"/>
+          <a:lstStyle/>
+          <a:p>
+            <a:pPr algn="ctr" indent="0" marL="0">
+              <a:lnSpc>
+                <a:spcPct val="100000"/>
+              </a:lnSpc>
+              <a:buNone/>
+            </a:pPr>
+            <a:r>
+              <a:rPr lang="en-US" sz="1700" b="1" dirty="0">
                 <a:solidFill>
                   <a:srgbClr val="1C1C1C"/>
                 </a:solidFill>
@@ -2408,22 +2351,22 @@
                 <a:ea typeface="Orbitron Bold" pitchFamily="34" charset="-122"/>
                 <a:cs typeface="Orbitron Bold" pitchFamily="34" charset="-120"/>
               </a:rPr>
-              <a:t>Maximum or minimum</a:t>
-            </a:r>
-            <a:endParaRPr lang="en-US" sz="1850" dirty="0"/>
-          </a:p>
-        </p:txBody>
-      </p:sp>
-      <p:sp>
-        <p:nvSpPr>
-          <p:cNvPr id="17" name="Text 12"/>
-          <p:cNvSpPr/>
-          <p:nvPr/>
-        </p:nvSpPr>
-        <p:spPr>
-          <a:xfrm>
-            <a:off x="8241300" y="3243759"/>
-            <a:ext cx="3080764" cy="302419"/>
+              <a:t>3</a:t>
+            </a:r>
+            <a:endParaRPr lang="en-US" sz="1700" dirty="0"/>
+          </a:p>
+        </p:txBody>
+      </p:sp>
+      <p:sp>
+        <p:nvSpPr>
+          <p:cNvPr id="13" name="Text 8"/>
+          <p:cNvSpPr/>
+          <p:nvPr/>
+        </p:nvSpPr>
+        <p:spPr>
+          <a:xfrm>
+            <a:off x="1386448" y="3437334"/>
+            <a:ext cx="9977089" cy="230684"/>
           </a:xfrm>
           <a:prstGeom prst="rect">
             <a:avLst/>
@@ -2437,12 +2380,54 @@
           <a:p>
             <a:pPr algn="l" indent="0" marL="0">
               <a:lnSpc>
-                <a:spcPct val="133000"/>
-              </a:lnSpc>
-              <a:buNone/>
-            </a:pPr>
-            <a:r>
-              <a:rPr lang="en-US" sz="1450" dirty="0">
+                <a:spcPct val="104000"/>
+              </a:lnSpc>
+              <a:buNone/>
+            </a:pPr>
+            <a:r>
+              <a:rPr lang="en-US" sz="1450" b="1" dirty="0">
+                <a:solidFill>
+                  <a:srgbClr val="1C1C1C"/>
+                </a:solidFill>
+                <a:latin typeface="Orbitron Bold" pitchFamily="34" charset="0"/>
+                <a:ea typeface="Orbitron Bold" pitchFamily="34" charset="-122"/>
+                <a:cs typeface="Orbitron Bold" pitchFamily="34" charset="-120"/>
+              </a:rPr>
+              <a:t>Maximum or minimum</a:t>
+            </a:r>
+            <a:endParaRPr lang="en-US" sz="1450" dirty="0"/>
+          </a:p>
+        </p:txBody>
+      </p:sp>
+      <p:sp>
+        <p:nvSpPr>
+          <p:cNvPr id="14" name="Text 9"/>
+          <p:cNvSpPr/>
+          <p:nvPr/>
+        </p:nvSpPr>
+        <p:spPr>
+          <a:xfrm>
+            <a:off x="1386448" y="3737173"/>
+            <a:ext cx="9977089" cy="210344"/>
+          </a:xfrm>
+          <a:prstGeom prst="rect">
+            <a:avLst/>
+          </a:prstGeom>
+          <a:noFill/>
+          <a:ln/>
+        </p:spPr>
+        <p:txBody>
+          <a:bodyPr wrap="none" lIns="0" tIns="0" rIns="0" bIns="0" rtlCol="0" anchor="t"/>
+          <a:lstStyle/>
+          <a:p>
+            <a:pPr algn="l" indent="0" marL="0">
+              <a:lnSpc>
+                <a:spcPct val="119000"/>
+              </a:lnSpc>
+              <a:buNone/>
+            </a:pPr>
+            <a:r>
+              <a:rPr lang="en-US" sz="1150" dirty="0">
                 <a:solidFill>
                   <a:srgbClr val="1C1C1C"/>
                 </a:solidFill>
@@ -2452,60 +2437,13 @@
               </a:rPr>
               <a:t>Start from the first real record</a:t>
             </a:r>
-            <a:endParaRPr lang="en-US" sz="1450" dirty="0"/>
-          </a:p>
-        </p:txBody>
-      </p:sp>
-      <p:sp>
-        <p:nvSpPr>
-          <p:cNvPr id="18" name="Shape 13"/>
-          <p:cNvSpPr/>
-          <p:nvPr/>
-        </p:nvSpPr>
-        <p:spPr>
-          <a:xfrm>
-            <a:off x="661475" y="3943251"/>
-            <a:ext cx="5339820" cy="1889621"/>
-          </a:xfrm>
-          <a:prstGeom prst="roundRect">
-            <a:avLst>
-              <a:gd name="adj" fmla="val 4201"/>
-            </a:avLst>
-          </a:prstGeom>
-          <a:solidFill>
-            <a:srgbClr val="D1E5FA"/>
-          </a:solidFill>
-          <a:ln w="19050">
-            <a:solidFill>
-              <a:srgbClr val="B7CBE0"/>
-            </a:solidFill>
-            <a:prstDash val="solid"/>
-          </a:ln>
-        </p:spPr>
-      </p:sp>
-      <p:sp>
-        <p:nvSpPr>
-          <p:cNvPr id="19" name="Shape 14"/>
-          <p:cNvSpPr/>
-          <p:nvPr/>
-        </p:nvSpPr>
-        <p:spPr>
-          <a:xfrm>
-            <a:off x="869531" y="4151313"/>
-            <a:ext cx="567021" cy="567035"/>
-          </a:xfrm>
-          <a:prstGeom prst="ellipse">
-            <a:avLst/>
-          </a:prstGeom>
-          <a:solidFill>
-            <a:srgbClr val="57A1EB"/>
-          </a:solidFill>
-          <a:ln/>
-        </p:spPr>
+            <a:endParaRPr lang="en-US" sz="1150" dirty="0"/>
+          </a:p>
+        </p:txBody>
       </p:sp>
       <p:pic>
         <p:nvPicPr>
-          <p:cNvPr id="20" name="Image 3" descr="preencoded.png">    </p:cNvPr>
+          <p:cNvPr id="15" name="Image 3" descr="preencoded.png">    </p:cNvPr>
           <p:cNvPicPr>
             <a:picLocks noChangeAspect="1"/>
           </p:cNvPicPr>
@@ -2525,8 +2463,8 @@
         </p:blipFill>
         <p:spPr>
           <a:xfrm>
-            <a:off x="1025499" y="4307185"/>
-            <a:ext cx="255085" cy="255091"/>
+            <a:off x="661475" y="4271963"/>
+            <a:ext cx="10868745" cy="886023"/>
           </a:xfrm>
           <a:prstGeom prst="rect">
             <a:avLst/>
@@ -2535,14 +2473,14 @@
       </p:pic>
       <p:sp>
         <p:nvSpPr>
-          <p:cNvPr id="21" name="Text 15"/>
-          <p:cNvSpPr/>
-          <p:nvPr/>
-        </p:nvSpPr>
-        <p:spPr>
-          <a:xfrm>
-            <a:off x="869531" y="4907359"/>
-            <a:ext cx="4923707" cy="295275"/>
+          <p:cNvPr id="16" name="Text 10"/>
+          <p:cNvSpPr/>
+          <p:nvPr/>
+        </p:nvSpPr>
+        <p:spPr>
+          <a:xfrm>
+            <a:off x="858717" y="4576564"/>
+            <a:ext cx="221451" cy="276820"/>
           </a:xfrm>
           <a:prstGeom prst="rect">
             <a:avLst/>
@@ -2551,17 +2489,17 @@
           <a:ln/>
         </p:spPr>
         <p:txBody>
-          <a:bodyPr wrap="none" lIns="0" tIns="0" rIns="0" bIns="0" rtlCol="0" anchor="t"/>
-          <a:lstStyle/>
-          <a:p>
-            <a:pPr algn="l" indent="0" marL="0">
-              <a:lnSpc>
-                <a:spcPct val="104000"/>
-              </a:lnSpc>
-              <a:buNone/>
-            </a:pPr>
-            <a:r>
-              <a:rPr lang="en-US" sz="1850" b="1" dirty="0">
+          <a:bodyPr wrap="none" lIns="0" tIns="0" rIns="0" bIns="0" rtlCol="0" anchor="ctr"/>
+          <a:lstStyle/>
+          <a:p>
+            <a:pPr algn="ctr" indent="0" marL="0">
+              <a:lnSpc>
+                <a:spcPct val="100000"/>
+              </a:lnSpc>
+              <a:buNone/>
+            </a:pPr>
+            <a:r>
+              <a:rPr lang="en-US" sz="1700" b="1" dirty="0">
                 <a:solidFill>
                   <a:srgbClr val="1C1C1C"/>
                 </a:solidFill>
@@ -2569,22 +2507,22 @@
                 <a:ea typeface="Orbitron Bold" pitchFamily="34" charset="-122"/>
                 <a:cs typeface="Orbitron Bold" pitchFamily="34" charset="-120"/>
               </a:rPr>
-              <a:t>Search</a:t>
-            </a:r>
-            <a:endParaRPr lang="en-US" sz="1850" dirty="0"/>
-          </a:p>
-        </p:txBody>
-      </p:sp>
-      <p:sp>
-        <p:nvSpPr>
-          <p:cNvPr id="22" name="Text 16"/>
-          <p:cNvSpPr/>
-          <p:nvPr/>
-        </p:nvSpPr>
-        <p:spPr>
-          <a:xfrm>
-            <a:off x="869531" y="5316041"/>
-            <a:ext cx="4923707" cy="308769"/>
+              <a:t>4</a:t>
+            </a:r>
+            <a:endParaRPr lang="en-US" sz="1700" dirty="0"/>
+          </a:p>
+        </p:txBody>
+      </p:sp>
+      <p:sp>
+        <p:nvSpPr>
+          <p:cNvPr id="17" name="Text 11"/>
+          <p:cNvSpPr/>
+          <p:nvPr/>
+        </p:nvSpPr>
+        <p:spPr>
+          <a:xfrm>
+            <a:off x="1386448" y="4438650"/>
+            <a:ext cx="9977089" cy="230684"/>
           </a:xfrm>
           <a:prstGeom prst="rect">
             <a:avLst/>
@@ -2598,12 +2536,54 @@
           <a:p>
             <a:pPr algn="l" indent="0" marL="0">
               <a:lnSpc>
-                <a:spcPct val="133000"/>
-              </a:lnSpc>
-              <a:buNone/>
-            </a:pPr>
-            <a:r>
-              <a:rPr lang="en-US" sz="1450" dirty="0">
+                <a:spcPct val="104000"/>
+              </a:lnSpc>
+              <a:buNone/>
+            </a:pPr>
+            <a:r>
+              <a:rPr lang="en-US" sz="1450" b="1" dirty="0">
+                <a:solidFill>
+                  <a:srgbClr val="1C1C1C"/>
+                </a:solidFill>
+                <a:latin typeface="Orbitron Bold" pitchFamily="34" charset="0"/>
+                <a:ea typeface="Orbitron Bold" pitchFamily="34" charset="-122"/>
+                <a:cs typeface="Orbitron Bold" pitchFamily="34" charset="-120"/>
+              </a:rPr>
+              <a:t>Search</a:t>
+            </a:r>
+            <a:endParaRPr lang="en-US" sz="1450" dirty="0"/>
+          </a:p>
+        </p:txBody>
+      </p:sp>
+      <p:sp>
+        <p:nvSpPr>
+          <p:cNvPr id="18" name="Text 12"/>
+          <p:cNvSpPr/>
+          <p:nvPr/>
+        </p:nvSpPr>
+        <p:spPr>
+          <a:xfrm>
+            <a:off x="1386448" y="4738489"/>
+            <a:ext cx="9977089" cy="210344"/>
+          </a:xfrm>
+          <a:prstGeom prst="rect">
+            <a:avLst/>
+          </a:prstGeom>
+          <a:noFill/>
+          <a:ln/>
+        </p:spPr>
+        <p:txBody>
+          <a:bodyPr wrap="none" lIns="0" tIns="0" rIns="0" bIns="0" rtlCol="0" anchor="t"/>
+          <a:lstStyle/>
+          <a:p>
+            <a:pPr algn="l" indent="0" marL="0">
+              <a:lnSpc>
+                <a:spcPct val="119000"/>
+              </a:lnSpc>
+              <a:buNone/>
+            </a:pPr>
+            <a:r>
+              <a:rPr lang="en-US" sz="1150" dirty="0">
                 <a:solidFill>
                   <a:srgbClr val="1C1C1C"/>
                 </a:solidFill>
@@ -2611,99 +2591,15 @@
                 <a:ea typeface="Roboto Condensed" pitchFamily="34" charset="-122"/>
                 <a:cs typeface="Roboto Condensed" pitchFamily="34" charset="-120"/>
               </a:rPr>
-              <a:t>Stop early with </a:t>
-            </a:r>
-            <a:pPr algn="l" indent="0" marL="0">
-              <a:lnSpc>
-                <a:spcPct val="133000"/>
-              </a:lnSpc>
-              <a:buNone/>
-            </a:pPr>
-            <a:r>
-              <a:rPr lang="en-US" sz="1450" dirty="0">
-                <a:solidFill>
-                  <a:srgbClr val="1C1C1C"/>
-                </a:solidFill>
-                <a:highlight>
-                  <a:srgbClr val="F2F2F2"/>
-                </a:highlight>
-                <a:latin typeface="Consolas" pitchFamily="34" charset="0"/>
-                <a:ea typeface="Consolas" pitchFamily="34" charset="-122"/>
-                <a:cs typeface="Consolas" pitchFamily="34" charset="-120"/>
-              </a:rPr>
-              <a:t>break</a:t>
-            </a:r>
-            <a:pPr algn="l" indent="0" marL="0">
-              <a:lnSpc>
-                <a:spcPct val="133000"/>
-              </a:lnSpc>
-              <a:buNone/>
-            </a:pPr>
-            <a:r>
-              <a:rPr lang="en-US" sz="1450" dirty="0">
-                <a:solidFill>
-                  <a:srgbClr val="1C1C1C"/>
-                </a:solidFill>
-                <a:latin typeface="Roboto Condensed" pitchFamily="34" charset="0"/>
-                <a:ea typeface="Roboto Condensed" pitchFamily="34" charset="-122"/>
-                <a:cs typeface="Roboto Condensed" pitchFamily="34" charset="-120"/>
-              </a:rPr>
-              <a:t> once found</a:t>
-            </a:r>
-            <a:endParaRPr lang="en-US" sz="1450" dirty="0"/>
-          </a:p>
-        </p:txBody>
-      </p:sp>
-      <p:sp>
-        <p:nvSpPr>
-          <p:cNvPr id="23" name="Shape 17"/>
-          <p:cNvSpPr/>
-          <p:nvPr/>
-        </p:nvSpPr>
-        <p:spPr>
-          <a:xfrm>
-            <a:off x="6190301" y="3943251"/>
-            <a:ext cx="5339820" cy="1889621"/>
-          </a:xfrm>
-          <a:prstGeom prst="roundRect">
-            <a:avLst>
-              <a:gd name="adj" fmla="val 4201"/>
-            </a:avLst>
-          </a:prstGeom>
-          <a:solidFill>
-            <a:srgbClr val="D1E5FA"/>
-          </a:solidFill>
-          <a:ln w="19050">
-            <a:solidFill>
-              <a:srgbClr val="B7CBE0"/>
-            </a:solidFill>
-            <a:prstDash val="solid"/>
-          </a:ln>
-        </p:spPr>
-      </p:sp>
-      <p:sp>
-        <p:nvSpPr>
-          <p:cNvPr id="24" name="Shape 18"/>
-          <p:cNvSpPr/>
-          <p:nvPr/>
-        </p:nvSpPr>
-        <p:spPr>
-          <a:xfrm>
-            <a:off x="6398358" y="4151313"/>
-            <a:ext cx="567021" cy="567035"/>
-          </a:xfrm>
-          <a:prstGeom prst="ellipse">
-            <a:avLst/>
-          </a:prstGeom>
-          <a:solidFill>
-            <a:srgbClr val="57A1EB"/>
-          </a:solidFill>
-          <a:ln/>
-        </p:spPr>
+              <a:t>Stop early with break once found</a:t>
+            </a:r>
+            <a:endParaRPr lang="en-US" sz="1150" dirty="0"/>
+          </a:p>
+        </p:txBody>
       </p:sp>
       <p:pic>
         <p:nvPicPr>
-          <p:cNvPr id="25" name="Image 4" descr="preencoded.png">    </p:cNvPr>
+          <p:cNvPr id="19" name="Image 4" descr="preencoded.png">    </p:cNvPr>
           <p:cNvPicPr>
             <a:picLocks noChangeAspect="1"/>
           </p:cNvPicPr>
@@ -2723,8 +2619,8 @@
         </p:blipFill>
         <p:spPr>
           <a:xfrm>
-            <a:off x="6554326" y="4307185"/>
-            <a:ext cx="255085" cy="255091"/>
+            <a:off x="661475" y="5273278"/>
+            <a:ext cx="10868745" cy="886023"/>
           </a:xfrm>
           <a:prstGeom prst="rect">
             <a:avLst/>
@@ -2733,14 +2629,14 @@
       </p:pic>
       <p:sp>
         <p:nvSpPr>
-          <p:cNvPr id="26" name="Text 19"/>
-          <p:cNvSpPr/>
-          <p:nvPr/>
-        </p:nvSpPr>
-        <p:spPr>
-          <a:xfrm>
-            <a:off x="6398358" y="4907359"/>
-            <a:ext cx="4923707" cy="295275"/>
+          <p:cNvPr id="20" name="Text 13"/>
+          <p:cNvSpPr/>
+          <p:nvPr/>
+        </p:nvSpPr>
+        <p:spPr>
+          <a:xfrm>
+            <a:off x="858717" y="5577880"/>
+            <a:ext cx="221451" cy="276820"/>
           </a:xfrm>
           <a:prstGeom prst="rect">
             <a:avLst/>
@@ -2749,17 +2645,17 @@
           <a:ln/>
         </p:spPr>
         <p:txBody>
-          <a:bodyPr wrap="none" lIns="0" tIns="0" rIns="0" bIns="0" rtlCol="0" anchor="t"/>
-          <a:lstStyle/>
-          <a:p>
-            <a:pPr algn="l" indent="0" marL="0">
-              <a:lnSpc>
-                <a:spcPct val="104000"/>
-              </a:lnSpc>
-              <a:buNone/>
-            </a:pPr>
-            <a:r>
-              <a:rPr lang="en-US" sz="1850" b="1" dirty="0">
+          <a:bodyPr wrap="none" lIns="0" tIns="0" rIns="0" bIns="0" rtlCol="0" anchor="ctr"/>
+          <a:lstStyle/>
+          <a:p>
+            <a:pPr algn="ctr" indent="0" marL="0">
+              <a:lnSpc>
+                <a:spcPct val="100000"/>
+              </a:lnSpc>
+              <a:buNone/>
+            </a:pPr>
+            <a:r>
+              <a:rPr lang="en-US" sz="1700" b="1" dirty="0">
                 <a:solidFill>
                   <a:srgbClr val="1C1C1C"/>
                 </a:solidFill>
@@ -2767,22 +2663,22 @@
                 <a:ea typeface="Orbitron Bold" pitchFamily="34" charset="-122"/>
                 <a:cs typeface="Orbitron Bold" pitchFamily="34" charset="-120"/>
               </a:rPr>
-              <a:t>Filter</a:t>
-            </a:r>
-            <a:endParaRPr lang="en-US" sz="1850" dirty="0"/>
-          </a:p>
-        </p:txBody>
-      </p:sp>
-      <p:sp>
-        <p:nvSpPr>
-          <p:cNvPr id="27" name="Text 20"/>
-          <p:cNvSpPr/>
-          <p:nvPr/>
-        </p:nvSpPr>
-        <p:spPr>
-          <a:xfrm>
-            <a:off x="6398358" y="5316041"/>
-            <a:ext cx="4923707" cy="302419"/>
+              <a:t>5</a:t>
+            </a:r>
+            <a:endParaRPr lang="en-US" sz="1700" dirty="0"/>
+          </a:p>
+        </p:txBody>
+      </p:sp>
+      <p:sp>
+        <p:nvSpPr>
+          <p:cNvPr id="21" name="Text 14"/>
+          <p:cNvSpPr/>
+          <p:nvPr/>
+        </p:nvSpPr>
+        <p:spPr>
+          <a:xfrm>
+            <a:off x="1386448" y="5439966"/>
+            <a:ext cx="9977089" cy="230684"/>
           </a:xfrm>
           <a:prstGeom prst="rect">
             <a:avLst/>
@@ -2796,12 +2692,54 @@
           <a:p>
             <a:pPr algn="l" indent="0" marL="0">
               <a:lnSpc>
-                <a:spcPct val="133000"/>
-              </a:lnSpc>
-              <a:buNone/>
-            </a:pPr>
-            <a:r>
-              <a:rPr lang="en-US" sz="1450" dirty="0">
+                <a:spcPct val="104000"/>
+              </a:lnSpc>
+              <a:buNone/>
+            </a:pPr>
+            <a:r>
+              <a:rPr lang="en-US" sz="1450" b="1" dirty="0">
+                <a:solidFill>
+                  <a:srgbClr val="1C1C1C"/>
+                </a:solidFill>
+                <a:latin typeface="Orbitron Bold" pitchFamily="34" charset="0"/>
+                <a:ea typeface="Orbitron Bold" pitchFamily="34" charset="-122"/>
+                <a:cs typeface="Orbitron Bold" pitchFamily="34" charset="-120"/>
+              </a:rPr>
+              <a:t>Filter</a:t>
+            </a:r>
+            <a:endParaRPr lang="en-US" sz="1450" dirty="0"/>
+          </a:p>
+        </p:txBody>
+      </p:sp>
+      <p:sp>
+        <p:nvSpPr>
+          <p:cNvPr id="22" name="Text 15"/>
+          <p:cNvSpPr/>
+          <p:nvPr/>
+        </p:nvSpPr>
+        <p:spPr>
+          <a:xfrm>
+            <a:off x="1386448" y="5739805"/>
+            <a:ext cx="9977089" cy="210344"/>
+          </a:xfrm>
+          <a:prstGeom prst="rect">
+            <a:avLst/>
+          </a:prstGeom>
+          <a:noFill/>
+          <a:ln/>
+        </p:spPr>
+        <p:txBody>
+          <a:bodyPr wrap="none" lIns="0" tIns="0" rIns="0" bIns="0" rtlCol="0" anchor="t"/>
+          <a:lstStyle/>
+          <a:p>
+            <a:pPr algn="l" indent="0" marL="0">
+              <a:lnSpc>
+                <a:spcPct val="119000"/>
+              </a:lnSpc>
+              <a:buNone/>
+            </a:pPr>
+            <a:r>
+              <a:rPr lang="en-US" sz="1150" dirty="0">
                 <a:solidFill>
                   <a:srgbClr val="1C1C1C"/>
                 </a:solidFill>
@@ -2811,13 +2749,13 @@
               </a:rPr>
               <a:t>Which records match a rule</a:t>
             </a:r>
-            <a:endParaRPr lang="en-US" sz="1450" dirty="0"/>
-          </a:p>
-        </p:txBody>
-      </p:sp>
-      <p:sp>
-        <p:nvSpPr>
-          <p:cNvPr id="28" name="Text 21"/>
+            <a:endParaRPr lang="en-US" sz="1150" dirty="0"/>
+          </a:p>
+        </p:txBody>
+      </p:sp>
+      <p:sp>
+        <p:nvSpPr>
+          <p:cNvPr id="23" name="Text 16"/>
           <p:cNvSpPr/>
           <p:nvPr/>
         </p:nvSpPr>
@@ -2890,8 +2828,8 @@
         </p:nvSpPr>
         <p:spPr>
           <a:xfrm>
-            <a:off x="661475" y="539155"/>
-            <a:ext cx="10868745" cy="535285"/>
+            <a:off x="661475" y="546398"/>
+            <a:ext cx="10868745" cy="563066"/>
           </a:xfrm>
           <a:prstGeom prst="rect">
             <a:avLst/>
@@ -2910,7 +2848,7 @@
               <a:buNone/>
             </a:pPr>
             <a:r>
-              <a:rPr lang="en-US" sz="3350" b="1" dirty="0">
+              <a:rPr lang="en-US" sz="3500" b="1" dirty="0">
                 <a:solidFill>
                   <a:srgbClr val="111111"/>
                 </a:solidFill>
@@ -2920,34 +2858,300 @@
               </a:rPr>
               <a:t>What you are about to build</a:t>
             </a:r>
-            <a:endParaRPr lang="en-US" sz="3350" dirty="0"/>
+            <a:endParaRPr lang="en-US" sz="3500" dirty="0"/>
+          </a:p>
+        </p:txBody>
+      </p:sp>
+      <p:sp>
+        <p:nvSpPr>
+          <p:cNvPr id="3" name="Shape 1"/>
+          <p:cNvSpPr/>
+          <p:nvPr/>
+        </p:nvSpPr>
+        <p:spPr>
+          <a:xfrm>
+            <a:off x="661475" y="1560215"/>
+            <a:ext cx="3518308" cy="2413298"/>
+          </a:xfrm>
+          <a:prstGeom prst="roundRect">
+            <a:avLst>
+              <a:gd name="adj" fmla="val 3135"/>
+            </a:avLst>
+          </a:prstGeom>
+          <a:solidFill>
+            <a:srgbClr val="D1E5FA"/>
+          </a:solidFill>
+          <a:ln w="19050">
+            <a:solidFill>
+              <a:srgbClr val="B7CBE0"/>
+            </a:solidFill>
+            <a:prstDash val="solid"/>
+          </a:ln>
+        </p:spPr>
+      </p:sp>
+      <p:sp>
+        <p:nvSpPr>
+          <p:cNvPr id="4" name="Text 2"/>
+          <p:cNvSpPr/>
+          <p:nvPr/>
+        </p:nvSpPr>
+        <p:spPr>
+          <a:xfrm>
+            <a:off x="860602" y="1759347"/>
+            <a:ext cx="3120054" cy="562967"/>
+          </a:xfrm>
+          <a:prstGeom prst="rect">
+            <a:avLst/>
+          </a:prstGeom>
+          <a:noFill/>
+          <a:ln/>
+        </p:spPr>
+        <p:txBody>
+          <a:bodyPr wrap="square" lIns="0" tIns="0" rIns="0" bIns="0" rtlCol="0" anchor="t">
+            <a:normAutofit/>
+          </a:bodyPr>
+          <a:lstStyle/>
+          <a:p>
+            <a:pPr algn="l" indent="0" marL="0">
+              <a:lnSpc>
+                <a:spcPct val="104000"/>
+              </a:lnSpc>
+              <a:buNone/>
+            </a:pPr>
+            <a:r>
+              <a:rPr lang="en-US" sz="1750" b="1" dirty="0">
+                <a:solidFill>
+                  <a:srgbClr val="1C1C1C"/>
+                </a:solidFill>
+                <a:latin typeface="Orbitron Bold" pitchFamily="34" charset="0"/>
+                <a:ea typeface="Orbitron Bold" pitchFamily="34" charset="-122"/>
+                <a:cs typeface="Orbitron Bold" pitchFamily="34" charset="-120"/>
+              </a:rPr>
+              <a:t>Build 1: Lab U03-03 Game Night Leaderboard</a:t>
+            </a:r>
+            <a:endParaRPr lang="en-US" sz="1750" dirty="0"/>
+          </a:p>
+        </p:txBody>
+      </p:sp>
+      <p:sp>
+        <p:nvSpPr>
+          <p:cNvPr id="5" name="Text 3"/>
+          <p:cNvSpPr/>
+          <p:nvPr/>
+        </p:nvSpPr>
+        <p:spPr>
+          <a:xfrm>
+            <a:off x="860602" y="2493963"/>
+            <a:ext cx="3120054" cy="1280418"/>
+          </a:xfrm>
+          <a:prstGeom prst="rect">
+            <a:avLst/>
+          </a:prstGeom>
+          <a:noFill/>
+          <a:ln/>
+        </p:spPr>
+        <p:txBody>
+          <a:bodyPr wrap="square" lIns="0" tIns="0" rIns="0" bIns="0" rtlCol="0" anchor="t">
+            <a:normAutofit/>
+          </a:bodyPr>
+          <a:lstStyle/>
+          <a:p>
+            <a:pPr algn="l" indent="0" marL="0">
+              <a:lnSpc>
+                <a:spcPct val="130000"/>
+              </a:lnSpc>
+              <a:spcAft>
+                <a:spcPts val="1200"/>
+              </a:spcAft>
+              <a:buNone/>
+            </a:pPr>
+            <a:r>
+              <a:rPr lang="en-US" sz="1400" dirty="0">
+                <a:solidFill>
+                  <a:srgbClr val="1C1C1C"/>
+                </a:solidFill>
+                <a:latin typeface="Roboto Condensed" pitchFamily="34" charset="0"/>
+                <a:ea typeface="Roboto Condensed" pitchFamily="34" charset="-122"/>
+                <a:cs typeface="Roboto Condensed" pitchFamily="34" charset="-120"/>
+              </a:rPr>
+              <a:t>Count, total, high score, low score, and a search</a:t>
+            </a:r>
+            <a:endParaRPr lang="en-US" sz="1400" dirty="0"/>
+          </a:p>
+          <a:p>
+            <a:pPr algn="l" indent="0" marL="0">
+              <a:lnSpc>
+                <a:spcPct val="130000"/>
+              </a:lnSpc>
+              <a:buNone/>
+            </a:pPr>
+            <a:r>
+              <a:rPr lang="en-US" sz="1400" dirty="0">
+                <a:solidFill>
+                  <a:srgbClr val="1C1C1C"/>
+                </a:solidFill>
+                <a:latin typeface="Roboto Condensed" pitchFamily="34" charset="0"/>
+                <a:ea typeface="Roboto Condensed" pitchFamily="34" charset="-122"/>
+                <a:cs typeface="Roboto Condensed" pitchFamily="34" charset="-120"/>
+              </a:rPr>
+              <a:t>Step 4 starts the low score at 0 on purpose</a:t>
+            </a:r>
+            <a:endParaRPr lang="en-US" sz="1400" dirty="0"/>
+          </a:p>
+        </p:txBody>
+      </p:sp>
+      <p:sp>
+        <p:nvSpPr>
+          <p:cNvPr id="6" name="Shape 4"/>
+          <p:cNvSpPr/>
+          <p:nvPr/>
+        </p:nvSpPr>
+        <p:spPr>
+          <a:xfrm>
+            <a:off x="661475" y="4145161"/>
+            <a:ext cx="3518308" cy="1850330"/>
+          </a:xfrm>
+          <a:prstGeom prst="roundRect">
+            <a:avLst>
+              <a:gd name="adj" fmla="val 4089"/>
+            </a:avLst>
+          </a:prstGeom>
+          <a:solidFill>
+            <a:srgbClr val="D1E5FA"/>
+          </a:solidFill>
+          <a:ln w="19050">
+            <a:solidFill>
+              <a:srgbClr val="B7CBE0"/>
+            </a:solidFill>
+            <a:prstDash val="solid"/>
+          </a:ln>
+        </p:spPr>
+      </p:sp>
+      <p:sp>
+        <p:nvSpPr>
+          <p:cNvPr id="7" name="Text 5"/>
+          <p:cNvSpPr/>
+          <p:nvPr/>
+        </p:nvSpPr>
+        <p:spPr>
+          <a:xfrm>
+            <a:off x="860602" y="4344293"/>
+            <a:ext cx="3120054" cy="281484"/>
+          </a:xfrm>
+          <a:prstGeom prst="rect">
+            <a:avLst/>
+          </a:prstGeom>
+          <a:noFill/>
+          <a:ln/>
+        </p:spPr>
+        <p:txBody>
+          <a:bodyPr wrap="none" lIns="0" tIns="0" rIns="0" bIns="0" rtlCol="0" anchor="t"/>
+          <a:lstStyle/>
+          <a:p>
+            <a:pPr algn="l" indent="0" marL="0">
+              <a:lnSpc>
+                <a:spcPct val="104000"/>
+              </a:lnSpc>
+              <a:buNone/>
+            </a:pPr>
+            <a:r>
+              <a:rPr lang="en-US" sz="1750" b="1" dirty="0">
+                <a:solidFill>
+                  <a:srgbClr val="1C1C1C"/>
+                </a:solidFill>
+                <a:latin typeface="Orbitron Bold" pitchFamily="34" charset="0"/>
+                <a:ea typeface="Orbitron Bold" pitchFamily="34" charset="-122"/>
+                <a:cs typeface="Orbitron Bold" pitchFamily="34" charset="-120"/>
+              </a:rPr>
+              <a:t>Build 2</a:t>
+            </a:r>
+            <a:endParaRPr lang="en-US" sz="1750" dirty="0"/>
+          </a:p>
+        </p:txBody>
+      </p:sp>
+      <p:sp>
+        <p:nvSpPr>
+          <p:cNvPr id="8" name="Text 6"/>
+          <p:cNvSpPr/>
+          <p:nvPr/>
+        </p:nvSpPr>
+        <p:spPr>
+          <a:xfrm>
+            <a:off x="860602" y="4797425"/>
+            <a:ext cx="3120054" cy="998934"/>
+          </a:xfrm>
+          <a:prstGeom prst="rect">
+            <a:avLst/>
+          </a:prstGeom>
+          <a:noFill/>
+          <a:ln/>
+        </p:spPr>
+        <p:txBody>
+          <a:bodyPr wrap="square" lIns="0" tIns="0" rIns="0" bIns="0" rtlCol="0" anchor="t"/>
+          <a:lstStyle/>
+          <a:p>
+            <a:pPr algn="l" indent="0" marL="0">
+              <a:lnSpc>
+                <a:spcPct val="130000"/>
+              </a:lnSpc>
+              <a:spcAft>
+                <a:spcPts val="1200"/>
+              </a:spcAft>
+              <a:buNone/>
+            </a:pPr>
+            <a:r>
+              <a:rPr lang="en-US" sz="1400" dirty="0">
+                <a:solidFill>
+                  <a:srgbClr val="1C1C1C"/>
+                </a:solidFill>
+                <a:latin typeface="Roboto Condensed" pitchFamily="34" charset="0"/>
+                <a:ea typeface="Roboto Condensed" pitchFamily="34" charset="-122"/>
+                <a:cs typeface="Roboto Condensed" pitchFamily="34" charset="-120"/>
+              </a:rPr>
+              <a:t>v1 test scripts, playtest fixes, README</a:t>
+            </a:r>
+            <a:endParaRPr lang="en-US" sz="1400" dirty="0"/>
+          </a:p>
+          <a:p>
+            <a:pPr algn="l" indent="0" marL="0">
+              <a:lnSpc>
+                <a:spcPct val="130000"/>
+              </a:lnSpc>
+              <a:buNone/>
+            </a:pPr>
+            <a:r>
+              <a:rPr lang="en-US" sz="1400" dirty="0">
+                <a:solidFill>
+                  <a:srgbClr val="1C1C1C"/>
+                </a:solidFill>
+                <a:latin typeface="Roboto Condensed" pitchFamily="34" charset="0"/>
+                <a:ea typeface="Roboto Condensed" pitchFamily="34" charset="-122"/>
+                <a:cs typeface="Roboto Condensed" pitchFamily="34" charset="-120"/>
+              </a:rPr>
+              <a:t>CAC teams: final checks and submission first</a:t>
+            </a:r>
+            <a:endParaRPr lang="en-US" sz="1400" dirty="0"/>
           </a:p>
         </p:txBody>
       </p:sp>
       <p:pic>
         <p:nvPicPr>
-          <p:cNvPr id="3" name="Image 0" descr="preencoded.png">    </p:cNvPr>
+          <p:cNvPr id="9" name="Image 0" descr="preencoded.png">    </p:cNvPr>
           <p:cNvPicPr>
             <a:picLocks noChangeAspect="1"/>
           </p:cNvPicPr>
           <p:nvPr/>
         </p:nvPicPr>
         <p:blipFill>
-          <a:blip r:embed="rId1">
-            <a:extLst>
-              <a:ext uri="{96DAC541-7B7A-43D3-8B79-37D633B846F1}">
-                <asvg:svgBlip xmlns:asvg="http://schemas.microsoft.com/office/drawing/2016/SVG/main" r:embed="rId2"/>
-              </a:ext>
-            </a:extLst>
-          </a:blip>
+          <a:blip r:embed="rId1"/>
           <a:stretch>
             <a:fillRect/>
           </a:stretch>
         </p:blipFill>
         <p:spPr>
           <a:xfrm>
-            <a:off x="661475" y="1481832"/>
-            <a:ext cx="3532397" cy="2523232"/>
+            <a:off x="4625661" y="1819771"/>
+            <a:ext cx="6910810" cy="3916164"/>
           </a:xfrm>
           <a:prstGeom prst="rect">
             <a:avLst/>
@@ -2956,344 +3160,7 @@
       </p:pic>
       <p:sp>
         <p:nvSpPr>
-          <p:cNvPr id="4" name="Text 1"/>
-          <p:cNvSpPr/>
-          <p:nvPr/>
-        </p:nvSpPr>
-        <p:spPr>
-          <a:xfrm>
-            <a:off x="885108" y="2582863"/>
-            <a:ext cx="256871" cy="321171"/>
-          </a:xfrm>
-          <a:prstGeom prst="rect">
-            <a:avLst/>
-          </a:prstGeom>
-          <a:noFill/>
-          <a:ln/>
-        </p:spPr>
-        <p:txBody>
-          <a:bodyPr wrap="none" lIns="0" tIns="0" rIns="0" bIns="0" rtlCol="0" anchor="ctr"/>
-          <a:lstStyle/>
-          <a:p>
-            <a:pPr algn="ctr" indent="0" marL="0">
-              <a:lnSpc>
-                <a:spcPct val="100000"/>
-              </a:lnSpc>
-              <a:buNone/>
-            </a:pPr>
-            <a:r>
-              <a:rPr lang="en-US" sz="2000" b="1" dirty="0">
-                <a:solidFill>
-                  <a:srgbClr val="1C1C1C"/>
-                </a:solidFill>
-                <a:latin typeface="Orbitron Bold" pitchFamily="34" charset="0"/>
-                <a:ea typeface="Orbitron Bold" pitchFamily="34" charset="-122"/>
-                <a:cs typeface="Orbitron Bold" pitchFamily="34" charset="-120"/>
-              </a:rPr>
-              <a:t>1</a:t>
-            </a:r>
-            <a:endParaRPr lang="en-US" sz="2000" dirty="0"/>
-          </a:p>
-        </p:txBody>
-      </p:sp>
-      <p:sp>
-        <p:nvSpPr>
-          <p:cNvPr id="5" name="Text 2"/>
-          <p:cNvSpPr/>
-          <p:nvPr/>
-        </p:nvSpPr>
-        <p:spPr>
-          <a:xfrm>
-            <a:off x="1520886" y="1672134"/>
-            <a:ext cx="2482689" cy="802779"/>
-          </a:xfrm>
-          <a:prstGeom prst="rect">
-            <a:avLst/>
-          </a:prstGeom>
-          <a:noFill/>
-          <a:ln/>
-        </p:spPr>
-        <p:txBody>
-          <a:bodyPr wrap="square" lIns="0" tIns="0" rIns="0" bIns="0" rtlCol="0" anchor="t">
-            <a:normAutofit/>
-          </a:bodyPr>
-          <a:lstStyle/>
-          <a:p>
-            <a:pPr algn="l" indent="0" marL="0">
-              <a:lnSpc>
-                <a:spcPct val="104000"/>
-              </a:lnSpc>
-              <a:buNone/>
-            </a:pPr>
-            <a:r>
-              <a:rPr lang="en-US" sz="1650" b="1" dirty="0">
-                <a:solidFill>
-                  <a:srgbClr val="1C1C1C"/>
-                </a:solidFill>
-                <a:latin typeface="Orbitron Bold" pitchFamily="34" charset="0"/>
-                <a:ea typeface="Orbitron Bold" pitchFamily="34" charset="-122"/>
-                <a:cs typeface="Orbitron Bold" pitchFamily="34" charset="-120"/>
-              </a:rPr>
-              <a:t>Build 1: Lab U03-03 Game Night Leaderboard</a:t>
-            </a:r>
-            <a:endParaRPr lang="en-US" sz="1650" dirty="0"/>
-          </a:p>
-        </p:txBody>
-      </p:sp>
-      <p:sp>
-        <p:nvSpPr>
-          <p:cNvPr id="6" name="Text 3"/>
-          <p:cNvSpPr/>
-          <p:nvPr/>
-        </p:nvSpPr>
-        <p:spPr>
-          <a:xfrm>
-            <a:off x="1520886" y="2630091"/>
-            <a:ext cx="2482689" cy="1184672"/>
-          </a:xfrm>
-          <a:prstGeom prst="rect">
-            <a:avLst/>
-          </a:prstGeom>
-          <a:noFill/>
-          <a:ln/>
-        </p:spPr>
-        <p:txBody>
-          <a:bodyPr wrap="square" lIns="0" tIns="0" rIns="0" bIns="0" rtlCol="0" anchor="t">
-            <a:normAutofit/>
-          </a:bodyPr>
-          <a:lstStyle/>
-          <a:p>
-            <a:pPr algn="l" indent="0" marL="0">
-              <a:lnSpc>
-                <a:spcPct val="127000"/>
-              </a:lnSpc>
-              <a:spcAft>
-                <a:spcPts val="1050"/>
-              </a:spcAft>
-              <a:buNone/>
-            </a:pPr>
-            <a:r>
-              <a:rPr lang="en-US" sz="1300" dirty="0">
-                <a:solidFill>
-                  <a:srgbClr val="1C1C1C"/>
-                </a:solidFill>
-                <a:latin typeface="Roboto Condensed" pitchFamily="34" charset="0"/>
-                <a:ea typeface="Roboto Condensed" pitchFamily="34" charset="-122"/>
-                <a:cs typeface="Roboto Condensed" pitchFamily="34" charset="-120"/>
-              </a:rPr>
-              <a:t>Count, total, high score, low score, and a search</a:t>
-            </a:r>
-            <a:endParaRPr lang="en-US" sz="1300" dirty="0"/>
-          </a:p>
-          <a:p>
-            <a:pPr algn="l" indent="0" marL="0">
-              <a:lnSpc>
-                <a:spcPct val="127000"/>
-              </a:lnSpc>
-              <a:buNone/>
-            </a:pPr>
-            <a:r>
-              <a:rPr lang="en-US" sz="1300" dirty="0">
-                <a:solidFill>
-                  <a:srgbClr val="1C1C1C"/>
-                </a:solidFill>
-                <a:latin typeface="Roboto Condensed" pitchFamily="34" charset="0"/>
-                <a:ea typeface="Roboto Condensed" pitchFamily="34" charset="-122"/>
-                <a:cs typeface="Roboto Condensed" pitchFamily="34" charset="-120"/>
-              </a:rPr>
-              <a:t>Step 4 starts the low score at 0 on purpose</a:t>
-            </a:r>
-            <a:endParaRPr lang="en-US" sz="1300" dirty="0"/>
-          </a:p>
-        </p:txBody>
-      </p:sp>
-      <p:pic>
-        <p:nvPicPr>
-          <p:cNvPr id="7" name="Image 1" descr="preencoded.png">    </p:cNvPr>
-          <p:cNvPicPr>
-            <a:picLocks noChangeAspect="1"/>
-          </p:cNvPicPr>
-          <p:nvPr/>
-        </p:nvPicPr>
-        <p:blipFill>
-          <a:blip r:embed="rId3">
-            <a:extLst>
-              <a:ext uri="{96DAC541-7B7A-43D3-8B79-37D633B846F1}">
-                <asvg:svgBlip xmlns:asvg="http://schemas.microsoft.com/office/drawing/2016/SVG/main" r:embed="rId4"/>
-              </a:ext>
-            </a:extLst>
-          </a:blip>
-          <a:stretch>
-            <a:fillRect/>
-          </a:stretch>
-        </p:blipFill>
-        <p:spPr>
-          <a:xfrm>
-            <a:off x="661475" y="4160242"/>
-            <a:ext cx="3532397" cy="1861046"/>
-          </a:xfrm>
-          <a:prstGeom prst="rect">
-            <a:avLst/>
-          </a:prstGeom>
-        </p:spPr>
-      </p:pic>
-      <p:sp>
-        <p:nvSpPr>
-          <p:cNvPr id="8" name="Text 4"/>
-          <p:cNvSpPr/>
-          <p:nvPr/>
-        </p:nvSpPr>
-        <p:spPr>
-          <a:xfrm>
-            <a:off x="885108" y="4930180"/>
-            <a:ext cx="256871" cy="321171"/>
-          </a:xfrm>
-          <a:prstGeom prst="rect">
-            <a:avLst/>
-          </a:prstGeom>
-          <a:noFill/>
-          <a:ln/>
-        </p:spPr>
-        <p:txBody>
-          <a:bodyPr wrap="none" lIns="0" tIns="0" rIns="0" bIns="0" rtlCol="0" anchor="ctr"/>
-          <a:lstStyle/>
-          <a:p>
-            <a:pPr algn="ctr" indent="0" marL="0">
-              <a:lnSpc>
-                <a:spcPct val="100000"/>
-              </a:lnSpc>
-              <a:buNone/>
-            </a:pPr>
-            <a:r>
-              <a:rPr lang="en-US" sz="2000" b="1" dirty="0">
-                <a:solidFill>
-                  <a:srgbClr val="1C1C1C"/>
-                </a:solidFill>
-                <a:latin typeface="Orbitron Bold" pitchFamily="34" charset="0"/>
-                <a:ea typeface="Orbitron Bold" pitchFamily="34" charset="-122"/>
-                <a:cs typeface="Orbitron Bold" pitchFamily="34" charset="-120"/>
-              </a:rPr>
-              <a:t>2</a:t>
-            </a:r>
-            <a:endParaRPr lang="en-US" sz="2000" dirty="0"/>
-          </a:p>
-        </p:txBody>
-      </p:sp>
-      <p:sp>
-        <p:nvSpPr>
-          <p:cNvPr id="9" name="Text 5"/>
-          <p:cNvSpPr/>
-          <p:nvPr/>
-        </p:nvSpPr>
-        <p:spPr>
-          <a:xfrm>
-            <a:off x="1520886" y="4350544"/>
-            <a:ext cx="2482689" cy="802779"/>
-          </a:xfrm>
-          <a:prstGeom prst="rect">
-            <a:avLst/>
-          </a:prstGeom>
-          <a:noFill/>
-          <a:ln/>
-        </p:spPr>
-        <p:txBody>
-          <a:bodyPr wrap="square" lIns="0" tIns="0" rIns="0" bIns="0" rtlCol="0" anchor="t">
-            <a:normAutofit/>
-          </a:bodyPr>
-          <a:lstStyle/>
-          <a:p>
-            <a:pPr algn="l" indent="0" marL="0">
-              <a:lnSpc>
-                <a:spcPct val="104000"/>
-              </a:lnSpc>
-              <a:buNone/>
-            </a:pPr>
-            <a:r>
-              <a:rPr lang="en-US" sz="1650" b="1" dirty="0">
-                <a:solidFill>
-                  <a:srgbClr val="1C1C1C"/>
-                </a:solidFill>
-                <a:latin typeface="Orbitron Bold" pitchFamily="34" charset="0"/>
-                <a:ea typeface="Orbitron Bold" pitchFamily="34" charset="-122"/>
-                <a:cs typeface="Orbitron Bold" pitchFamily="34" charset="-120"/>
-              </a:rPr>
-              <a:t>Build 2: v1 test scripts, playtest fixes, README</a:t>
-            </a:r>
-            <a:endParaRPr lang="en-US" sz="1650" dirty="0"/>
-          </a:p>
-        </p:txBody>
-      </p:sp>
-      <p:sp>
-        <p:nvSpPr>
-          <p:cNvPr id="10" name="Text 6"/>
-          <p:cNvSpPr/>
-          <p:nvPr/>
-        </p:nvSpPr>
-        <p:spPr>
-          <a:xfrm>
-            <a:off x="1520886" y="5308501"/>
-            <a:ext cx="2482689" cy="522486"/>
-          </a:xfrm>
-          <a:prstGeom prst="rect">
-            <a:avLst/>
-          </a:prstGeom>
-          <a:noFill/>
-          <a:ln/>
-        </p:spPr>
-        <p:txBody>
-          <a:bodyPr wrap="square" lIns="0" tIns="0" rIns="0" bIns="0" rtlCol="0" anchor="t">
-            <a:normAutofit/>
-          </a:bodyPr>
-          <a:lstStyle/>
-          <a:p>
-            <a:pPr algn="l" indent="0" marL="0">
-              <a:lnSpc>
-                <a:spcPct val="127000"/>
-              </a:lnSpc>
-              <a:buNone/>
-            </a:pPr>
-            <a:r>
-              <a:rPr lang="en-US" sz="1300" dirty="0">
-                <a:solidFill>
-                  <a:srgbClr val="1C1C1C"/>
-                </a:solidFill>
-                <a:latin typeface="Roboto Condensed" pitchFamily="34" charset="0"/>
-                <a:ea typeface="Roboto Condensed" pitchFamily="34" charset="-122"/>
-                <a:cs typeface="Roboto Condensed" pitchFamily="34" charset="-120"/>
-              </a:rPr>
-              <a:t>CAC teams: confirm your submission before noon</a:t>
-            </a:r>
-            <a:endParaRPr lang="en-US" sz="1300" dirty="0"/>
-          </a:p>
-        </p:txBody>
-      </p:sp>
-      <p:pic>
-        <p:nvPicPr>
-          <p:cNvPr id="11" name="Image 2" descr="preencoded.png">    </p:cNvPr>
-          <p:cNvPicPr>
-            <a:picLocks noChangeAspect="1"/>
-          </p:cNvPicPr>
-          <p:nvPr/>
-        </p:nvPicPr>
-        <p:blipFill>
-          <a:blip r:embed="rId5"/>
-          <a:stretch>
-            <a:fillRect/>
-          </a:stretch>
-        </p:blipFill>
-        <p:spPr>
-          <a:xfrm>
-            <a:off x="4618120" y="1791295"/>
-            <a:ext cx="6918350" cy="3920430"/>
-          </a:xfrm>
-          <a:prstGeom prst="rect">
-            <a:avLst/>
-          </a:prstGeom>
-        </p:spPr>
-      </p:pic>
-      <p:sp>
-        <p:nvSpPr>
-          <p:cNvPr id="12" name="Text 7"/>
+          <p:cNvPr id="10" name="Text 7"/>
           <p:cNvSpPr/>
           <p:nvPr/>
         </p:nvSpPr>
@@ -3374,7 +3241,7 @@
         </p:blipFill>
         <p:spPr>
           <a:xfrm>
-            <a:off x="0" y="0"/>
+            <a:off x="7619809" y="0"/>
             <a:ext cx="4571886" cy="6858000"/>
           </a:xfrm>
           <a:prstGeom prst="rect">
@@ -3390,7 +3257,7 @@
         </p:nvSpPr>
         <p:spPr>
           <a:xfrm>
-            <a:off x="5233360" y="1746945"/>
+            <a:off x="661475" y="1746945"/>
             <a:ext cx="6296860" cy="1181298"/>
           </a:xfrm>
           <a:prstGeom prst="rect">
@@ -3434,7 +3301,7 @@
         </p:nvSpPr>
         <p:spPr>
           <a:xfrm>
-            <a:off x="5233360" y="3211711"/>
+            <a:off x="661475" y="3211711"/>
             <a:ext cx="6296860" cy="1776413"/>
           </a:xfrm>
           <a:prstGeom prst="rect">
@@ -3563,7 +3430,7 @@
         </p:nvSpPr>
         <p:spPr>
           <a:xfrm>
-            <a:off x="4704141" y="6457255"/>
+            <a:off x="132255" y="6457255"/>
             <a:ext cx="3640642" cy="158750"/>
           </a:xfrm>
           <a:prstGeom prst="rect">
@@ -4981,7 +4848,7 @@
         </p:blipFill>
         <p:spPr>
           <a:xfrm>
-            <a:off x="0" y="0"/>
+            <a:off x="7619809" y="0"/>
             <a:ext cx="4571886" cy="6858000"/>
           </a:xfrm>
           <a:prstGeom prst="rect">
@@ -4997,7 +4864,7 @@
         </p:nvSpPr>
         <p:spPr>
           <a:xfrm>
-            <a:off x="5233360" y="1743770"/>
+            <a:off x="661475" y="1746945"/>
             <a:ext cx="6296860" cy="1181298"/>
           </a:xfrm>
           <a:prstGeom prst="rect">
@@ -5041,8 +4908,8 @@
         </p:nvSpPr>
         <p:spPr>
           <a:xfrm>
-            <a:off x="5233360" y="3208536"/>
-            <a:ext cx="6296860" cy="1782763"/>
+            <a:off x="661475" y="3211711"/>
+            <a:ext cx="6296860" cy="1776413"/>
           </a:xfrm>
           <a:prstGeom prst="rect">
             <a:avLst/>
@@ -5089,32 +4956,11 @@
                 <a:solidFill>
                   <a:srgbClr val="1C1C1C"/>
                 </a:solidFill>
-                <a:highlight>
-                  <a:srgbClr val="F2F2F2"/>
-                </a:highlight>
-                <a:latin typeface="Consolas" pitchFamily="34" charset="0"/>
-                <a:ea typeface="Consolas" pitchFamily="34" charset="-122"/>
-                <a:cs typeface="Consolas" pitchFamily="34" charset="-120"/>
-              </a:rPr>
-              <a:t>break</a:t>
-            </a:r>
-            <a:pPr algn="l" marL="294640" indent="-294640">
-              <a:lnSpc>
-                <a:spcPct val="133000"/>
-              </a:lnSpc>
-              <a:buSzPct val="100000"/>
-              <a:buChar char="•"/>
-            </a:pPr>
-            <a:r>
-              <a:rPr lang="en-US" sz="1450" dirty="0">
-                <a:solidFill>
-                  <a:srgbClr val="1C1C1C"/>
-                </a:solidFill>
                 <a:latin typeface="Roboto Condensed" pitchFamily="34" charset="0"/>
                 <a:ea typeface="Roboto Condensed" pitchFamily="34" charset="-122"/>
                 <a:cs typeface="Roboto Condensed" pitchFamily="34" charset="-120"/>
               </a:rPr>
-              <a:t> the moment it matches</a:t>
+              <a:t>break the moment it matches</a:t>
             </a:r>
             <a:endParaRPr lang="en-US" sz="1450" dirty="0"/>
           </a:p>
@@ -5135,7 +4981,7 @@
                 <a:ea typeface="Roboto Condensed" pitchFamily="34" charset="-122"/>
                 <a:cs typeface="Roboto Condensed" pitchFamily="34" charset="-120"/>
               </a:rPr>
-              <a:t>Static hallway: found after reading 3 lines</a:t>
+              <a:t>static hallway: found after reading 3 lines</a:t>
             </a:r>
             <a:endParaRPr lang="en-US" sz="1450" dirty="0"/>
           </a:p>
@@ -5191,7 +5037,7 @@
         </p:nvSpPr>
         <p:spPr>
           <a:xfrm>
-            <a:off x="4704141" y="6457255"/>
+            <a:off x="132255" y="6457255"/>
             <a:ext cx="3640642" cy="158750"/>
           </a:xfrm>
           <a:prstGeom prst="rect">
@@ -5258,8 +5104,8 @@
         </p:nvSpPr>
         <p:spPr>
           <a:xfrm>
-            <a:off x="661475" y="1577777"/>
-            <a:ext cx="10868745" cy="590649"/>
+            <a:off x="661475" y="519807"/>
+            <a:ext cx="10868745" cy="295275"/>
           </a:xfrm>
           <a:prstGeom prst="rect">
             <a:avLst/>
@@ -5278,7 +5124,7 @@
               <a:buNone/>
             </a:pPr>
             <a:r>
-              <a:rPr lang="en-US" sz="3700" b="1" dirty="0">
+              <a:rPr lang="en-US" sz="1850" b="1" dirty="0">
                 <a:solidFill>
                   <a:srgbClr val="111111"/>
                 </a:solidFill>
@@ -5288,7 +5134,7 @@
               </a:rPr>
               <a:t>Same question, two structures</a:t>
             </a:r>
-            <a:endParaRPr lang="en-US" sz="3700" dirty="0"/>
+            <a:endParaRPr lang="en-US" sz="1850" dirty="0"/>
           </a:p>
         </p:txBody>
       </p:sp>
@@ -5300,18 +5146,18 @@
         </p:nvSpPr>
         <p:spPr>
           <a:xfrm>
-            <a:off x="661475" y="2664520"/>
-            <a:ext cx="2507394" cy="2280146"/>
+            <a:off x="661475" y="3109813"/>
+            <a:ext cx="2635879" cy="821630"/>
           </a:xfrm>
           <a:prstGeom prst="roundRect">
             <a:avLst>
-              <a:gd name="adj" fmla="val 3482"/>
+              <a:gd name="adj" fmla="val 4831"/>
             </a:avLst>
           </a:prstGeom>
           <a:solidFill>
             <a:srgbClr val="D1E5FA"/>
           </a:solidFill>
-          <a:ln w="19050">
+          <a:ln w="6350">
             <a:solidFill>
               <a:srgbClr val="B7CBE0"/>
             </a:solidFill>
@@ -5327,8 +5173,8 @@
         </p:nvSpPr>
         <p:spPr>
           <a:xfrm>
-            <a:off x="869531" y="2872581"/>
-            <a:ext cx="2091280" cy="295275"/>
+            <a:off x="762279" y="3210620"/>
+            <a:ext cx="2434271" cy="147638"/>
           </a:xfrm>
           <a:prstGeom prst="rect">
             <a:avLst/>
@@ -5347,7 +5193,7 @@
               <a:buNone/>
             </a:pPr>
             <a:r>
-              <a:rPr lang="en-US" sz="1850" b="1" dirty="0">
+              <a:rPr lang="en-US" sz="900" b="1" dirty="0">
                 <a:solidFill>
                   <a:srgbClr val="1C1C1C"/>
                 </a:solidFill>
@@ -5355,9 +5201,9 @@
                 <a:ea typeface="Orbitron Bold" pitchFamily="34" charset="-122"/>
                 <a:cs typeface="Orbitron Bold" pitchFamily="34" charset="-120"/>
               </a:rPr>
-              <a:t>Unsorted</a:t>
-            </a:r>
-            <a:endParaRPr lang="en-US" sz="1850" dirty="0"/>
+              <a:t>Unsorted (order added)</a:t>
+            </a:r>
+            <a:endParaRPr lang="en-US" sz="900" dirty="0"/>
           </a:p>
         </p:txBody>
       </p:sp>
@@ -5369,8 +5215,8 @@
         </p:nvSpPr>
         <p:spPr>
           <a:xfrm>
-            <a:off x="869531" y="3356868"/>
-            <a:ext cx="2091280" cy="1379736"/>
+            <a:off x="762279" y="3405485"/>
+            <a:ext cx="2434271" cy="425152"/>
           </a:xfrm>
           <a:prstGeom prst="rect">
             <a:avLst/>
@@ -5379,22 +5225,20 @@
           <a:ln/>
         </p:spPr>
         <p:txBody>
-          <a:bodyPr wrap="square" lIns="0" tIns="0" rIns="0" bIns="0" rtlCol="0" anchor="t">
-            <a:normAutofit/>
-          </a:bodyPr>
-          <a:lstStyle/>
-          <a:p>
-            <a:pPr algn="l" indent="0" marL="0">
-              <a:lnSpc>
-                <a:spcPct val="133000"/>
+          <a:bodyPr wrap="square" lIns="0" tIns="0" rIns="0" bIns="0" rtlCol="0" anchor="t"/>
+          <a:lstStyle/>
+          <a:p>
+            <a:pPr algn="l" indent="0" marL="0">
+              <a:lnSpc>
+                <a:spcPct val="100000"/>
               </a:lnSpc>
               <a:spcAft>
-                <a:spcPts val="1300"/>
+                <a:spcPts val="300"/>
               </a:spcAft>
               <a:buNone/>
             </a:pPr>
             <a:r>
-              <a:rPr lang="en-US" sz="1450" dirty="0">
+              <a:rPr lang="en-US" sz="700" dirty="0">
                 <a:solidFill>
                   <a:srgbClr val="1C1C1C"/>
                 </a:solidFill>
@@ -5402,19 +5246,22 @@
                 <a:ea typeface="Roboto Condensed" pitchFamily="34" charset="-122"/>
                 <a:cs typeface="Roboto Condensed" pitchFamily="34" charset="-120"/>
               </a:rPr>
-              <a:t>Songs in the order added: read all 8 lines</a:t>
-            </a:r>
-            <a:endParaRPr lang="en-US" sz="1450" dirty="0"/>
-          </a:p>
-          <a:p>
-            <a:pPr algn="l" indent="0" marL="0">
-              <a:lnSpc>
-                <a:spcPct val="133000"/>
-              </a:lnSpc>
-              <a:buNone/>
-            </a:pPr>
-            <a:r>
-              <a:rPr lang="en-US" sz="1450" dirty="0">
+              <a:t>Which song has the most plays?</a:t>
+            </a:r>
+            <a:endParaRPr lang="en-US" sz="700" dirty="0"/>
+          </a:p>
+          <a:p>
+            <a:pPr algn="l" indent="0" marL="0">
+              <a:lnSpc>
+                <a:spcPct val="100000"/>
+              </a:lnSpc>
+              <a:spcAft>
+                <a:spcPts val="300"/>
+              </a:spcAft>
+              <a:buNone/>
+            </a:pPr>
+            <a:r>
+              <a:rPr lang="en-US" sz="700" dirty="0">
                 <a:solidFill>
                   <a:srgbClr val="1C1C1C"/>
                 </a:solidFill>
@@ -5422,9 +5269,29 @@
                 <a:ea typeface="Roboto Condensed" pitchFamily="34" charset="-122"/>
                 <a:cs typeface="Roboto Condensed" pitchFamily="34" charset="-120"/>
               </a:rPr>
+              <a:t>Songs in the order added: read all 8 lines</a:t>
+            </a:r>
+            <a:endParaRPr lang="en-US" sz="700" dirty="0"/>
+          </a:p>
+          <a:p>
+            <a:pPr algn="l" indent="0" marL="0">
+              <a:lnSpc>
+                <a:spcPct val="100000"/>
+              </a:lnSpc>
+              <a:buNone/>
+            </a:pPr>
+            <a:r>
+              <a:rPr lang="en-US" sz="700" dirty="0">
+                <a:solidFill>
+                  <a:srgbClr val="1C1C1C"/>
+                </a:solidFill>
+                <a:latin typeface="Roboto Condensed" pitchFamily="34" charset="0"/>
+                <a:ea typeface="Roboto Condensed" pitchFamily="34" charset="-122"/>
+                <a:cs typeface="Roboto Condensed" pitchFamily="34" charset="-120"/>
+              </a:rPr>
               <a:t>With 800,000 songs: 800,000 reads</a:t>
             </a:r>
-            <a:endParaRPr lang="en-US" sz="1450" dirty="0"/>
+            <a:endParaRPr lang="en-US" sz="700" dirty="0"/>
           </a:p>
         </p:txBody>
       </p:sp>
@@ -5436,18 +5303,18 @@
         </p:nvSpPr>
         <p:spPr>
           <a:xfrm>
-            <a:off x="3357875" y="2664520"/>
-            <a:ext cx="2507394" cy="2280146"/>
+            <a:off x="3344580" y="3109813"/>
+            <a:ext cx="2635978" cy="821630"/>
           </a:xfrm>
           <a:prstGeom prst="roundRect">
             <a:avLst>
-              <a:gd name="adj" fmla="val 3482"/>
+              <a:gd name="adj" fmla="val 4831"/>
             </a:avLst>
           </a:prstGeom>
           <a:solidFill>
             <a:srgbClr val="D1E5FA"/>
           </a:solidFill>
-          <a:ln w="19050">
+          <a:ln w="6350">
             <a:solidFill>
               <a:srgbClr val="B7CBE0"/>
             </a:solidFill>
@@ -5463,8 +5330,8 @@
         </p:nvSpPr>
         <p:spPr>
           <a:xfrm>
-            <a:off x="3565932" y="2872581"/>
-            <a:ext cx="2091280" cy="295275"/>
+            <a:off x="3445384" y="3210620"/>
+            <a:ext cx="2434370" cy="147638"/>
           </a:xfrm>
           <a:prstGeom prst="rect">
             <a:avLst/>
@@ -5483,7 +5350,7 @@
               <a:buNone/>
             </a:pPr>
             <a:r>
-              <a:rPr lang="en-US" sz="1850" b="1" dirty="0">
+              <a:rPr lang="en-US" sz="900" b="1" dirty="0">
                 <a:solidFill>
                   <a:srgbClr val="1C1C1C"/>
                 </a:solidFill>
@@ -5493,7 +5360,7 @@
               </a:rPr>
               <a:t>Sorted by plays</a:t>
             </a:r>
-            <a:endParaRPr lang="en-US" sz="1850" dirty="0"/>
+            <a:endParaRPr lang="en-US" sz="900" dirty="0"/>
           </a:p>
         </p:txBody>
       </p:sp>
@@ -5505,8 +5372,8 @@
         </p:nvSpPr>
         <p:spPr>
           <a:xfrm>
-            <a:off x="3565932" y="3356868"/>
-            <a:ext cx="2091280" cy="1379736"/>
+            <a:off x="3445384" y="3405485"/>
+            <a:ext cx="2434370" cy="425152"/>
           </a:xfrm>
           <a:prstGeom prst="rect">
             <a:avLst/>
@@ -5515,22 +5382,20 @@
           <a:ln/>
         </p:spPr>
         <p:txBody>
-          <a:bodyPr wrap="square" lIns="0" tIns="0" rIns="0" bIns="0" rtlCol="0" anchor="t">
-            <a:normAutofit/>
-          </a:bodyPr>
-          <a:lstStyle/>
-          <a:p>
-            <a:pPr algn="l" indent="0" marL="0">
-              <a:lnSpc>
-                <a:spcPct val="133000"/>
+          <a:bodyPr wrap="square" lIns="0" tIns="0" rIns="0" bIns="0" rtlCol="0" anchor="t"/>
+          <a:lstStyle/>
+          <a:p>
+            <a:pPr algn="l" indent="0" marL="0">
+              <a:lnSpc>
+                <a:spcPct val="100000"/>
               </a:lnSpc>
               <a:spcAft>
-                <a:spcPts val="1300"/>
+                <a:spcPts val="300"/>
               </a:spcAft>
               <a:buNone/>
             </a:pPr>
             <a:r>
-              <a:rPr lang="en-US" sz="1450" dirty="0">
+              <a:rPr lang="en-US" sz="700" dirty="0">
                 <a:solidFill>
                   <a:srgbClr val="1C1C1C"/>
                 </a:solidFill>
@@ -5538,19 +5403,22 @@
                 <a:ea typeface="Roboto Condensed" pitchFamily="34" charset="-122"/>
                 <a:cs typeface="Roboto Condensed" pitchFamily="34" charset="-120"/>
               </a:rPr>
-              <a:t>Songs sorted by plays: read 1 line</a:t>
-            </a:r>
-            <a:endParaRPr lang="en-US" sz="1450" dirty="0"/>
-          </a:p>
-          <a:p>
-            <a:pPr algn="l" indent="0" marL="0">
-              <a:lnSpc>
-                <a:spcPct val="133000"/>
-              </a:lnSpc>
-              <a:buNone/>
-            </a:pPr>
-            <a:r>
-              <a:rPr lang="en-US" sz="1450" dirty="0">
+              <a:t>Which song has the most plays?</a:t>
+            </a:r>
+            <a:endParaRPr lang="en-US" sz="700" dirty="0"/>
+          </a:p>
+          <a:p>
+            <a:pPr algn="l" indent="0" marL="0">
+              <a:lnSpc>
+                <a:spcPct val="100000"/>
+              </a:lnSpc>
+              <a:spcAft>
+                <a:spcPts val="300"/>
+              </a:spcAft>
+              <a:buNone/>
+            </a:pPr>
+            <a:r>
+              <a:rPr lang="en-US" sz="700" dirty="0">
                 <a:solidFill>
                   <a:srgbClr val="1C1C1C"/>
                 </a:solidFill>
@@ -5558,41 +5426,19 @@
                 <a:ea typeface="Roboto Condensed" pitchFamily="34" charset="-122"/>
                 <a:cs typeface="Roboto Condensed" pitchFamily="34" charset="-120"/>
               </a:rPr>
-              <a:t>With 800,000 songs: 1 read</a:t>
-            </a:r>
-            <a:endParaRPr lang="en-US" sz="1450" dirty="0"/>
-          </a:p>
-        </p:txBody>
-      </p:sp>
-      <p:sp>
-        <p:nvSpPr>
-          <p:cNvPr id="9" name="Text 7"/>
-          <p:cNvSpPr/>
-          <p:nvPr/>
-        </p:nvSpPr>
-        <p:spPr>
-          <a:xfrm>
-            <a:off x="6332776" y="2621955"/>
-            <a:ext cx="5813379" cy="302419"/>
-          </a:xfrm>
-          <a:prstGeom prst="rect">
-            <a:avLst/>
-          </a:prstGeom>
-          <a:noFill/>
-          <a:ln/>
-        </p:spPr>
-        <p:txBody>
-          <a:bodyPr wrap="none" lIns="0" tIns="0" rIns="0" bIns="0" rtlCol="0" anchor="t"/>
-          <a:lstStyle/>
-          <a:p>
-            <a:pPr algn="l" indent="0" marL="0">
-              <a:lnSpc>
-                <a:spcPct val="133000"/>
-              </a:lnSpc>
-              <a:buNone/>
-            </a:pPr>
-            <a:r>
-              <a:rPr lang="en-US" sz="1450" dirty="0">
+              <a:t>Songs sorted by plays: read 1 line</a:t>
+            </a:r>
+            <a:endParaRPr lang="en-US" sz="700" dirty="0"/>
+          </a:p>
+          <a:p>
+            <a:pPr algn="l" indent="0" marL="0">
+              <a:lnSpc>
+                <a:spcPct val="100000"/>
+              </a:lnSpc>
+              <a:buNone/>
+            </a:pPr>
+            <a:r>
+              <a:rPr lang="en-US" sz="700" dirty="0">
                 <a:solidFill>
                   <a:srgbClr val="1C1C1C"/>
                 </a:solidFill>
@@ -5600,37 +5446,57 @@
                 <a:ea typeface="Roboto Condensed" pitchFamily="34" charset="-122"/>
                 <a:cs typeface="Roboto Condensed" pitchFamily="34" charset="-120"/>
               </a:rPr>
-              <a:t>Which song has the most plays?</a:t>
-            </a:r>
-            <a:endParaRPr lang="en-US" sz="1450" dirty="0"/>
-          </a:p>
-        </p:txBody>
-      </p:sp>
-      <p:sp>
-        <p:nvSpPr>
-          <p:cNvPr id="10" name="Shape 8"/>
-          <p:cNvSpPr/>
-          <p:nvPr/>
-        </p:nvSpPr>
-        <p:spPr>
-          <a:xfrm>
-            <a:off x="6332776" y="3136999"/>
-            <a:ext cx="5203794" cy="736997"/>
-          </a:xfrm>
-          <a:prstGeom prst="roundRect">
-            <a:avLst>
-              <a:gd name="adj" fmla="val 10772"/>
-            </a:avLst>
-          </a:prstGeom>
-          <a:solidFill>
-            <a:srgbClr val="FCF2B5"/>
-          </a:solidFill>
+              <a:t>With 800,000 songs: 1 read</a:t>
+            </a:r>
+            <a:endParaRPr lang="en-US" sz="700" dirty="0"/>
+          </a:p>
+        </p:txBody>
+      </p:sp>
+      <p:sp>
+        <p:nvSpPr>
+          <p:cNvPr id="9" name="Text 7"/>
+          <p:cNvSpPr/>
+          <p:nvPr/>
+        </p:nvSpPr>
+        <p:spPr>
+          <a:xfrm>
+            <a:off x="661475" y="3984526"/>
+            <a:ext cx="5928668" cy="113407"/>
+          </a:xfrm>
+          <a:prstGeom prst="rect">
+            <a:avLst/>
+          </a:prstGeom>
+          <a:noFill/>
           <a:ln/>
         </p:spPr>
+        <p:txBody>
+          <a:bodyPr wrap="none" lIns="0" tIns="0" rIns="0" bIns="0" rtlCol="0" anchor="t"/>
+          <a:lstStyle/>
+          <a:p>
+            <a:pPr algn="l" indent="0" marL="0">
+              <a:lnSpc>
+                <a:spcPct val="100000"/>
+              </a:lnSpc>
+              <a:buNone/>
+            </a:pPr>
+            <a:r>
+              <a:rPr lang="en-US" sz="700" dirty="0">
+                <a:solidFill>
+                  <a:srgbClr val="1C1C1C"/>
+                </a:solidFill>
+                <a:latin typeface="Roboto Condensed" pitchFamily="34" charset="0"/>
+                <a:ea typeface="Roboto Condensed" pitchFamily="34" charset="-122"/>
+                <a:cs typeface="Roboto Condensed" pitchFamily="34" charset="-120"/>
+              </a:rPr>
+              <a:t>Sorting costs work every time a count changes</a:t>
+            </a:r>
+            <a:endParaRPr lang="en-US" sz="700" dirty="0"/>
+          </a:p>
+        </p:txBody>
       </p:sp>
       <p:pic>
         <p:nvPicPr>
-          <p:cNvPr id="11" name="Image 0" descr="preencoded.png">    </p:cNvPr>
+          <p:cNvPr id="10" name="Image 0" descr="preencoded.png">    </p:cNvPr>
           <p:cNvPicPr>
             <a:picLocks noChangeAspect="1"/>
           </p:cNvPicPr>
@@ -5644,8 +5510,8 @@
         </p:blipFill>
         <p:spPr>
           <a:xfrm>
-            <a:off x="6521783" y="3423741"/>
-            <a:ext cx="236234" cy="189012"/>
+            <a:off x="6217487" y="939006"/>
+            <a:ext cx="5319083" cy="5319216"/>
           </a:xfrm>
           <a:prstGeom prst="rect">
             <a:avLst/>
@@ -5654,55 +5520,13 @@
       </p:pic>
       <p:sp>
         <p:nvSpPr>
-          <p:cNvPr id="12" name="Text 9"/>
-          <p:cNvSpPr/>
-          <p:nvPr/>
-        </p:nvSpPr>
-        <p:spPr>
-          <a:xfrm>
-            <a:off x="6947024" y="3354288"/>
-            <a:ext cx="5010124" cy="302419"/>
-          </a:xfrm>
-          <a:prstGeom prst="rect">
-            <a:avLst/>
-          </a:prstGeom>
-          <a:noFill/>
-          <a:ln/>
-        </p:spPr>
-        <p:txBody>
-          <a:bodyPr wrap="none" lIns="0" tIns="0" rIns="0" bIns="0" rtlCol="0" anchor="t"/>
-          <a:lstStyle/>
-          <a:p>
-            <a:pPr algn="l" indent="0" marL="0">
-              <a:lnSpc>
-                <a:spcPct val="133000"/>
-              </a:lnSpc>
-              <a:buNone/>
-            </a:pPr>
-            <a:r>
-              <a:rPr lang="en-US" sz="1450" dirty="0">
-                <a:solidFill>
-                  <a:srgbClr val="000000"/>
-                </a:solidFill>
-                <a:latin typeface="Roboto Condensed" pitchFamily="34" charset="0"/>
-                <a:ea typeface="Roboto Condensed" pitchFamily="34" charset="-122"/>
-                <a:cs typeface="Roboto Condensed" pitchFamily="34" charset="-120"/>
-              </a:rPr>
-              <a:t>Sorting costs work every time a count changes</a:t>
-            </a:r>
-            <a:endParaRPr lang="en-US" sz="1450" dirty="0"/>
-          </a:p>
-        </p:txBody>
-      </p:sp>
-      <p:sp>
-        <p:nvSpPr>
-          <p:cNvPr id="13" name="Text 10"/>
-          <p:cNvSpPr/>
-          <p:nvPr/>
-        </p:nvSpPr>
-        <p:spPr>
-          <a:xfrm>
-            <a:off x="132255" y="6457255"/>
+          <p:cNvPr id="11" name="Text 8"/>
+          <p:cNvSpPr/>
+          <p:nvPr/>
+        </p:nvSpPr>
+        <p:spPr>
+          <a:xfrm>
+            <a:off x="132255" y="6553200"/>
             <a:ext cx="3640642" cy="158750"/>
           </a:xfrm>
           <a:prstGeom prst="rect">
@@ -6206,7 +6030,7 @@
         </p:nvSpPr>
         <p:spPr>
           <a:xfrm>
-            <a:off x="661475" y="3088680"/>
+            <a:off x="661475" y="2928838"/>
             <a:ext cx="3518308" cy="648395"/>
           </a:xfrm>
           <a:prstGeom prst="roundRect">
@@ -6228,7 +6052,7 @@
         </p:nvSpPr>
         <p:spPr>
           <a:xfrm>
-            <a:off x="877568" y="3268762"/>
+            <a:off x="877568" y="3108920"/>
             <a:ext cx="3695707" cy="288230"/>
           </a:xfrm>
           <a:prstGeom prst="rect">
@@ -6270,8 +6094,8 @@
         </p:nvSpPr>
         <p:spPr>
           <a:xfrm>
-            <a:off x="661475" y="3930253"/>
-            <a:ext cx="3518308" cy="1138634"/>
+            <a:off x="661475" y="3770412"/>
+            <a:ext cx="3518308" cy="1458218"/>
           </a:xfrm>
           <a:prstGeom prst="rect">
             <a:avLst/>
@@ -6374,7 +6198,118 @@
                 <a:ea typeface="Roboto Condensed" pitchFamily="34" charset="-122"/>
                 <a:cs typeface="Roboto Condensed" pitchFamily="34" charset="-120"/>
               </a:rPr>
-              <a:t> means no real play count can ever be less than it. The variable never updates, so the result is blank and zero.</a:t>
+              <a:t> means no real play count can ever be less than the starting value. The condition </a:t>
+            </a:r>
+            <a:pPr algn="l" indent="0" marL="0">
+              <a:lnSpc>
+                <a:spcPct val="130000"/>
+              </a:lnSpc>
+              <a:buNone/>
+            </a:pPr>
+            <a:r>
+              <a:rPr lang="en-US" sz="1400" dirty="0">
+                <a:solidFill>
+                  <a:srgbClr val="1C1C1C"/>
+                </a:solidFill>
+                <a:highlight>
+                  <a:srgbClr val="F2F2F2"/>
+                </a:highlight>
+                <a:latin typeface="Consolas" pitchFamily="34" charset="0"/>
+                <a:ea typeface="Consolas" pitchFamily="34" charset="-122"/>
+                <a:cs typeface="Consolas" pitchFamily="34" charset="-120"/>
+              </a:rPr>
+              <a:t>plays &lt; fewest_plays</a:t>
+            </a:r>
+            <a:pPr algn="l" indent="0" marL="0">
+              <a:lnSpc>
+                <a:spcPct val="130000"/>
+              </a:lnSpc>
+              <a:buNone/>
+            </a:pPr>
+            <a:r>
+              <a:rPr lang="en-US" sz="1400" dirty="0">
+                <a:solidFill>
+                  <a:srgbClr val="1C1C1C"/>
+                </a:solidFill>
+                <a:latin typeface="Roboto Condensed" pitchFamily="34" charset="0"/>
+                <a:ea typeface="Roboto Condensed" pitchFamily="34" charset="-122"/>
+                <a:cs typeface="Roboto Condensed" pitchFamily="34" charset="-120"/>
+              </a:rPr>
+              <a:t> is never true, so </a:t>
+            </a:r>
+            <a:pPr algn="l" indent="0" marL="0">
+              <a:lnSpc>
+                <a:spcPct val="130000"/>
+              </a:lnSpc>
+              <a:buNone/>
+            </a:pPr>
+            <a:r>
+              <a:rPr lang="en-US" sz="1400" dirty="0">
+                <a:solidFill>
+                  <a:srgbClr val="1C1C1C"/>
+                </a:solidFill>
+                <a:highlight>
+                  <a:srgbClr val="F2F2F2"/>
+                </a:highlight>
+                <a:latin typeface="Consolas" pitchFamily="34" charset="0"/>
+                <a:ea typeface="Consolas" pitchFamily="34" charset="-122"/>
+                <a:cs typeface="Consolas" pitchFamily="34" charset="-120"/>
+              </a:rPr>
+              <a:t>quiet_song</a:t>
+            </a:r>
+            <a:pPr algn="l" indent="0" marL="0">
+              <a:lnSpc>
+                <a:spcPct val="130000"/>
+              </a:lnSpc>
+              <a:buNone/>
+            </a:pPr>
+            <a:r>
+              <a:rPr lang="en-US" sz="1400" dirty="0">
+                <a:solidFill>
+                  <a:srgbClr val="1C1C1C"/>
+                </a:solidFill>
+                <a:latin typeface="Roboto Condensed" pitchFamily="34" charset="0"/>
+                <a:ea typeface="Roboto Condensed" pitchFamily="34" charset="-122"/>
+                <a:cs typeface="Roboto Condensed" pitchFamily="34" charset="-120"/>
+              </a:rPr>
+              <a:t> stays blank and </a:t>
+            </a:r>
+            <a:pPr algn="l" indent="0" marL="0">
+              <a:lnSpc>
+                <a:spcPct val="130000"/>
+              </a:lnSpc>
+              <a:buNone/>
+            </a:pPr>
+            <a:r>
+              <a:rPr lang="en-US" sz="1400" dirty="0">
+                <a:solidFill>
+                  <a:srgbClr val="1C1C1C"/>
+                </a:solidFill>
+                <a:highlight>
+                  <a:srgbClr val="F2F2F2"/>
+                </a:highlight>
+                <a:latin typeface="Consolas" pitchFamily="34" charset="0"/>
+                <a:ea typeface="Consolas" pitchFamily="34" charset="-122"/>
+                <a:cs typeface="Consolas" pitchFamily="34" charset="-120"/>
+              </a:rPr>
+              <a:t>fewest_plays</a:t>
+            </a:r>
+            <a:pPr algn="l" indent="0" marL="0">
+              <a:lnSpc>
+                <a:spcPct val="130000"/>
+              </a:lnSpc>
+              <a:buNone/>
+            </a:pPr>
+            <a:r>
+              <a:rPr lang="en-US" sz="1400" dirty="0">
+                <a:solidFill>
+                  <a:srgbClr val="1C1C1C"/>
+                </a:solidFill>
+                <a:latin typeface="Roboto Condensed" pitchFamily="34" charset="0"/>
+                <a:ea typeface="Roboto Condensed" pitchFamily="34" charset="-122"/>
+                <a:cs typeface="Roboto Condensed" pitchFamily="34" charset="-120"/>
+              </a:rPr>
+              <a:t> stays zero.</a:t>
             </a:r>
             <a:endParaRPr lang="en-US" sz="1400" dirty="0"/>
           </a:p>
